--- a/client_alignment_deck_v2.pptx
+++ b/client_alignment_deck_v2.pptx
@@ -3661,7 +3661,7 @@
                 </a:solidFill>
                 <a:latin typeface="Calibri"/>
               </a:rPr>
-              <a:t>•  Top-down hierarchy: capability ← theme ← epic. Discovered together, reviewable at each level.</a:t>
+              <a:t>•  Top-down cascade: capabilities first, then themes within each capability, then epics within each theme. Reviewable at every level.</a:t>
             </a:r>
           </a:p>
         </p:txBody>
@@ -4299,8 +4299,9 @@
                 </a:solidFill>
                 <a:latin typeface="Calibri"/>
               </a:rPr>
-              <a:t>cluster_confidence
-&lt; 0.80 on admit</a:t>
+              <a:t>admit_confidence
+&lt; 0.80 (any of
+5 catalogs)</a:t>
             </a:r>
           </a:p>
         </p:txBody>
@@ -5033,8 +5034,8 @@
         </p:nvSpPr>
         <p:spPr>
           <a:xfrm>
-            <a:off x="457200" y="6108191"/>
-            <a:ext cx="5532120" cy="384048"/>
+            <a:off x="457200" y="6016751"/>
+            <a:ext cx="5532120" cy="457200"/>
           </a:xfrm>
           <a:prstGeom prst="rect">
             <a:avLst/>
@@ -5049,13 +5050,13 @@
           <a:p>
             <a:pPr algn="l"/>
             <a:r>
-              <a:rPr sz="950" b="0" i="1">
+              <a:rPr sz="850" b="0" i="1">
                 <a:solidFill>
                   <a:srgbClr val="55606E"/>
                 </a:solidFill>
                 <a:latin typeface="Calibri"/>
               </a:rPr>
-              <a:t>hitl_status: auto (untouched) · confirmed · corrected · rejected. Pipeline never waits.  Thresholds configurable per discipline.</a:t>
+              <a:t>hitl_status: auto · confirmed · corrected · rejected.  Tagger has no direct trigger — confidence rolls into Story Extractor.  Milestone 1: decisions applied to corpus manually (auto emit-back on roadmap).</a:t>
             </a:r>
           </a:p>
         </p:txBody>
@@ -5068,8 +5069,8 @@
         </p:nvSpPr>
         <p:spPr>
           <a:xfrm>
-            <a:off x="6263640" y="1325880"/>
-            <a:ext cx="5468112" cy="329184"/>
+            <a:off x="6263640" y="1417320"/>
+            <a:ext cx="5468112" cy="256032"/>
           </a:xfrm>
           <a:prstGeom prst="rect">
             <a:avLst/>
@@ -5084,7 +5085,7 @@
           <a:p>
             <a:pPr algn="l"/>
             <a:r>
-              <a:rPr sz="1300" b="1" i="0">
+              <a:rPr sz="1050" b="1" i="0">
                 <a:solidFill>
                   <a:srgbClr val="1F4E79"/>
                 </a:solidFill>
@@ -5180,7 +5181,7 @@
                 </a:solidFill>
                 <a:latin typeface="Consolas"/>
               </a:rPr>
-              <a:t>catalog item     →  confidence: 0.92      # admit-rubric score</a:t>
+              <a:t>catalog item     →  admit_confidence: 0.92    # rubric score (cluster or entity)</a:t>
             </a:r>
           </a:p>
           <a:p>
@@ -5196,7 +5197,7 @@
                 </a:solidFill>
                 <a:latin typeface="Consolas"/>
               </a:rPr>
-              <a:t>tagger output    →  confidence: 0.94      # per-field + overall</a:t>
+              <a:t>tagger output    →  confidence: 0.94          # rolls into story extraction_confidence</a:t>
             </a:r>
           </a:p>
           <a:p>
@@ -5228,7 +5229,7 @@
                 </a:solidFill>
                 <a:latin typeface="Consolas"/>
               </a:rPr>
-              <a:t>sampled validator →  verdict_confidence:  0.96</a:t>
+              <a:t>sampled validator →  verdict: PASS / FAIL  +  reason</a:t>
             </a:r>
           </a:p>
           <a:p>
@@ -5337,8 +5338,8 @@
         </p:nvSpPr>
         <p:spPr>
           <a:xfrm>
-            <a:off x="6263640" y="3840480"/>
-            <a:ext cx="5468112" cy="329184"/>
+            <a:off x="6263640" y="3931920"/>
+            <a:ext cx="5468112" cy="256032"/>
           </a:xfrm>
           <a:prstGeom prst="rect">
             <a:avLst/>
@@ -5353,7 +5354,7 @@
           <a:p>
             <a:pPr algn="l"/>
             <a:r>
-              <a:rPr sz="1300" b="1" i="0">
+              <a:rPr sz="1050" b="1" i="0">
                 <a:solidFill>
                   <a:srgbClr val="1F4E79"/>
                 </a:solidFill>
@@ -7297,7 +7298,7 @@
                 </a:solidFill>
                 <a:latin typeface="Calibri"/>
               </a:rPr>
-              <a:t>•  No universal lab_stage artifact — workflow axis is the discovered business_capability catalog, per discipline.</a:t>
+              <a:t>•  No universal lab_stage_v1 artifact — workflow axis is the discovered business_capability_v1 catalog, per discipline.</a:t>
             </a:r>
           </a:p>
           <a:p>
@@ -8212,7 +8213,7 @@
                 </a:solidFill>
                 <a:latin typeface="Calibri"/>
               </a:rPr>
-              <a:t>Three phases. Phase 1 once, Phase 2 in parallel across SOPs, Phase 3 deferred to the roadmap.</a:t>
+              <a:t>Three phases. Phase 1 once (taxonomy cascade + entity extraction), Phase 2 in parallel across SOPs, Phase 3 deferred to the roadmap.</a:t>
             </a:r>
           </a:p>
         </p:txBody>
@@ -9607,7 +9608,7 @@
                 </a:solidFill>
                 <a:latin typeface="Calibri"/>
               </a:rPr>
-              <a:t>Sampled Validator QC</a:t>
+              <a:t>Sampled Validator QC (Quality Control)</a:t>
             </a:r>
           </a:p>
         </p:txBody>
@@ -9731,7 +9732,7 @@
                 </a:solidFill>
                 <a:latin typeface="Calibri"/>
               </a:rPr>
-              <a:t>Review queue (HITL)</a:t>
+              <a:t>Review queue (HITL — Human-in-the-Loop)</a:t>
             </a:r>
           </a:p>
         </p:txBody>
@@ -10260,7 +10261,7 @@
                 </a:solidFill>
                 <a:latin typeface="Calibri"/>
               </a:rPr>
-              <a:t>Runs in: Phase 1 (5 runs: capability, theme, epic, persona, test)</a:t>
+              <a:t>Runs in: Phase 1 (5 runs, two modes)</a:t>
             </a:r>
           </a:p>
         </p:txBody>
@@ -10330,7 +10331,8 @@
                 </a:solidFill>
                 <a:latin typeface="Calibri"/>
               </a:rPr>
-              <a:t>Operates on already-clustered chunks (chunking and clustering are deterministic preprocessing). Names each cluster and admits via a structured rubric. Top-down hierarchy: capability ← theme ← epic.</a:t>
+              <a:t>Taxonomy mode (capability → theme → epic, top-down cascade): names each cluster and admits via rubric; child levels cluster only within their parent's chunks.
+Entity mode (persona, test): extracts named mentions per chunk, dedupes across the corpus, admits each unique entity.</a:t>
             </a:r>
           </a:p>
         </p:txBody>
@@ -10400,7 +10402,7 @@
                 </a:solidFill>
                 <a:latin typeface="Calibri"/>
               </a:rPr>
-              <a:t>One agent class with 5 runs, instead of 5 separate agent classes.</a:t>
+              <a:t>One agent class with two modes, instead of five separate agent classes.</a:t>
             </a:r>
           </a:p>
         </p:txBody>
@@ -10648,7 +10650,7 @@
                 </a:solidFill>
                 <a:latin typeface="Calibri"/>
               </a:rPr>
-              <a:t>Single structured-output call: looks up persona refs, test ref, and capability ref for each chunk against persona_v1, test_v1, and business_capability_v1. Three lookups in one call.</a:t>
+              <a:t>Single structured-output call: looks up persona refs, test ref, and capability ref against persona_v1, test_v1, and business_capability_v1. theme_ref and epic_ref are inherited directly from the chunk's Phase 1 cascade buckets — no LLM lookup needed.</a:t>
             </a:r>
           </a:p>
         </p:txBody>
@@ -10718,7 +10720,7 @@
                 </a:solidFill>
                 <a:latin typeface="Calibri"/>
               </a:rPr>
-              <a:t>Three resolutions on the same chunk are bundled into one structured-output call instead of three round-trips.</a:t>
+              <a:t>Three LLM lookups bundled into one call; theme/epic come for free from cascade.</a:t>
             </a:r>
           </a:p>
         </p:txBody>
@@ -11598,7 +11600,7 @@
                 </a:solidFill>
                 <a:latin typeface="Calibri"/>
               </a:rPr>
-              <a:t>One pass over the corpus produces all 5 catalogs.  Same agent, five runs — different granularity / discovery mode each run.</a:t>
+              <a:t>The 3 taxonomy runs cascade top-down (capability → theme within capability → epic within theme).  The 2 entity runs (persona, test) are parallel.  All five share the same chunking; each step admits its own.</a:t>
             </a:r>
           </a:p>
         </p:txBody>
@@ -11633,7 +11635,7 @@
                 </a:solidFill>
                 <a:latin typeface="Calibri"/>
               </a:rPr>
-              <a:t>Phase 1 pipeline (preprocessing + agent)</a:t>
+              <a:t>Phase 1 pipeline</a:t>
             </a:r>
           </a:p>
         </p:txBody>
@@ -11754,8 +11756,508 @@
         </p:nvSpPr>
         <p:spPr>
           <a:xfrm>
-            <a:off x="457200" y="2724912"/>
-            <a:ext cx="3291840" cy="384048"/>
+            <a:off x="457200" y="3017520"/>
+            <a:ext cx="1554480" cy="777240"/>
+          </a:xfrm>
+          <a:prstGeom prst="roundRect">
+            <a:avLst/>
+          </a:prstGeom>
+          <a:solidFill>
+            <a:srgbClr val="FAE9CB"/>
+          </a:solidFill>
+          <a:ln w="12700">
+            <a:solidFill>
+              <a:srgbClr val="C9952C"/>
+            </a:solidFill>
+          </a:ln>
+        </p:spPr>
+        <p:style>
+          <a:lnRef idx="1">
+            <a:schemeClr val="accent1"/>
+          </a:lnRef>
+          <a:fillRef idx="3">
+            <a:schemeClr val="accent1"/>
+          </a:fillRef>
+          <a:effectRef idx="2">
+            <a:schemeClr val="accent1"/>
+          </a:effectRef>
+          <a:fontRef idx="minor">
+            <a:schemeClr val="lt1"/>
+          </a:fontRef>
+        </p:style>
+        <p:txBody>
+          <a:bodyPr rtlCol="0" anchor="ctr" wrap="square" lIns="73152" rIns="73152" tIns="36576" bIns="36576"/>
+          <a:lstStyle/>
+          <a:p>
+            <a:pPr algn="ctr"/>
+            <a:r>
+              <a:rPr sz="1200" b="0" i="0">
+                <a:solidFill>
+                  <a:srgbClr val="1F2D3D"/>
+                </a:solidFill>
+                <a:latin typeface="Calibri"/>
+              </a:rPr>
+              <a:t/>
+            </a:r>
+          </a:p>
+        </p:txBody>
+      </p:sp>
+      <p:sp>
+        <p:nvSpPr>
+          <p:cNvPr id="9" name="TextBox 8"/>
+          <p:cNvSpPr txBox="1"/>
+          <p:nvPr/>
+        </p:nvSpPr>
+        <p:spPr>
+          <a:xfrm>
+            <a:off x="530352" y="3063240"/>
+            <a:ext cx="1408176" cy="219456"/>
+          </a:xfrm>
+          <a:prstGeom prst="rect">
+            <a:avLst/>
+          </a:prstGeom>
+          <a:noFill/>
+        </p:spPr>
+        <p:txBody>
+          <a:bodyPr wrap="square" anchor="t">
+            <a:spAutoFit/>
+          </a:bodyPr>
+          <a:lstStyle/>
+          <a:p>
+            <a:pPr algn="l"/>
+            <a:r>
+              <a:rPr sz="950" b="1" i="0">
+                <a:solidFill>
+                  <a:srgbClr val="1F2D3D"/>
+                </a:solidFill>
+                <a:latin typeface="Calibri"/>
+              </a:rPr>
+              <a:t>Capability run</a:t>
+            </a:r>
+          </a:p>
+        </p:txBody>
+      </p:sp>
+      <p:sp>
+        <p:nvSpPr>
+          <p:cNvPr id="10" name="TextBox 9"/>
+          <p:cNvSpPr txBox="1"/>
+          <p:nvPr/>
+        </p:nvSpPr>
+        <p:spPr>
+          <a:xfrm>
+            <a:off x="530352" y="3291840"/>
+            <a:ext cx="1408176" cy="466344"/>
+          </a:xfrm>
+          <a:prstGeom prst="rect">
+            <a:avLst/>
+          </a:prstGeom>
+          <a:noFill/>
+        </p:spPr>
+        <p:txBody>
+          <a:bodyPr wrap="square" anchor="t">
+            <a:spAutoFit/>
+          </a:bodyPr>
+          <a:lstStyle/>
+          <a:p>
+            <a:pPr algn="l"/>
+            <a:r>
+              <a:rPr sz="800" b="0" i="0">
+                <a:solidFill>
+                  <a:srgbClr val="1F2D3D"/>
+                </a:solidFill>
+                <a:latin typeface="Calibri"/>
+              </a:rPr>
+              <a:t>Cluster all chunks → name +
+admit.  ~6–12 capabilities.</a:t>
+            </a:r>
+          </a:p>
+        </p:txBody>
+      </p:sp>
+      <p:sp>
+        <p:nvSpPr>
+          <p:cNvPr id="11" name="Rounded Rectangle 10"/>
+          <p:cNvSpPr/>
+          <p:nvPr/>
+        </p:nvSpPr>
+        <p:spPr>
+          <a:xfrm>
+            <a:off x="457200" y="3941064"/>
+            <a:ext cx="1554480" cy="777240"/>
+          </a:xfrm>
+          <a:prstGeom prst="roundRect">
+            <a:avLst/>
+          </a:prstGeom>
+          <a:solidFill>
+            <a:srgbClr val="FAE9CB"/>
+          </a:solidFill>
+          <a:ln w="12700">
+            <a:solidFill>
+              <a:srgbClr val="C9952C"/>
+            </a:solidFill>
+          </a:ln>
+        </p:spPr>
+        <p:style>
+          <a:lnRef idx="1">
+            <a:schemeClr val="accent1"/>
+          </a:lnRef>
+          <a:fillRef idx="3">
+            <a:schemeClr val="accent1"/>
+          </a:fillRef>
+          <a:effectRef idx="2">
+            <a:schemeClr val="accent1"/>
+          </a:effectRef>
+          <a:fontRef idx="minor">
+            <a:schemeClr val="lt1"/>
+          </a:fontRef>
+        </p:style>
+        <p:txBody>
+          <a:bodyPr rtlCol="0" anchor="ctr" wrap="square" lIns="73152" rIns="73152" tIns="36576" bIns="36576"/>
+          <a:lstStyle/>
+          <a:p>
+            <a:pPr algn="ctr"/>
+            <a:r>
+              <a:rPr sz="1200" b="0" i="0">
+                <a:solidFill>
+                  <a:srgbClr val="1F2D3D"/>
+                </a:solidFill>
+                <a:latin typeface="Calibri"/>
+              </a:rPr>
+              <a:t/>
+            </a:r>
+          </a:p>
+        </p:txBody>
+      </p:sp>
+      <p:sp>
+        <p:nvSpPr>
+          <p:cNvPr id="12" name="TextBox 11"/>
+          <p:cNvSpPr txBox="1"/>
+          <p:nvPr/>
+        </p:nvSpPr>
+        <p:spPr>
+          <a:xfrm>
+            <a:off x="530352" y="3986784"/>
+            <a:ext cx="1408176" cy="219456"/>
+          </a:xfrm>
+          <a:prstGeom prst="rect">
+            <a:avLst/>
+          </a:prstGeom>
+          <a:noFill/>
+        </p:spPr>
+        <p:txBody>
+          <a:bodyPr wrap="square" anchor="t">
+            <a:spAutoFit/>
+          </a:bodyPr>
+          <a:lstStyle/>
+          <a:p>
+            <a:pPr algn="l"/>
+            <a:r>
+              <a:rPr sz="950" b="1" i="0">
+                <a:solidFill>
+                  <a:srgbClr val="1F2D3D"/>
+                </a:solidFill>
+                <a:latin typeface="Calibri"/>
+              </a:rPr>
+              <a:t>Theme run (per capability)</a:t>
+            </a:r>
+          </a:p>
+        </p:txBody>
+      </p:sp>
+      <p:sp>
+        <p:nvSpPr>
+          <p:cNvPr id="13" name="TextBox 12"/>
+          <p:cNvSpPr txBox="1"/>
+          <p:nvPr/>
+        </p:nvSpPr>
+        <p:spPr>
+          <a:xfrm>
+            <a:off x="530352" y="4215384"/>
+            <a:ext cx="1408176" cy="466344"/>
+          </a:xfrm>
+          <a:prstGeom prst="rect">
+            <a:avLst/>
+          </a:prstGeom>
+          <a:noFill/>
+        </p:spPr>
+        <p:txBody>
+          <a:bodyPr wrap="square" anchor="t">
+            <a:spAutoFit/>
+          </a:bodyPr>
+          <a:lstStyle/>
+          <a:p>
+            <a:pPr algn="l"/>
+            <a:r>
+              <a:rPr sz="800" b="0" i="0">
+                <a:solidFill>
+                  <a:srgbClr val="1F2D3D"/>
+                </a:solidFill>
+                <a:latin typeface="Calibri"/>
+              </a:rPr>
+              <a:t>Re-cluster within each
+capability.  ~12–20 themes.</a:t>
+            </a:r>
+          </a:p>
+        </p:txBody>
+      </p:sp>
+      <p:sp>
+        <p:nvSpPr>
+          <p:cNvPr id="14" name="Rounded Rectangle 13"/>
+          <p:cNvSpPr/>
+          <p:nvPr/>
+        </p:nvSpPr>
+        <p:spPr>
+          <a:xfrm>
+            <a:off x="457200" y="4864608"/>
+            <a:ext cx="1554480" cy="777240"/>
+          </a:xfrm>
+          <a:prstGeom prst="roundRect">
+            <a:avLst/>
+          </a:prstGeom>
+          <a:solidFill>
+            <a:srgbClr val="FAE9CB"/>
+          </a:solidFill>
+          <a:ln w="12700">
+            <a:solidFill>
+              <a:srgbClr val="C9952C"/>
+            </a:solidFill>
+          </a:ln>
+        </p:spPr>
+        <p:style>
+          <a:lnRef idx="1">
+            <a:schemeClr val="accent1"/>
+          </a:lnRef>
+          <a:fillRef idx="3">
+            <a:schemeClr val="accent1"/>
+          </a:fillRef>
+          <a:effectRef idx="2">
+            <a:schemeClr val="accent1"/>
+          </a:effectRef>
+          <a:fontRef idx="minor">
+            <a:schemeClr val="lt1"/>
+          </a:fontRef>
+        </p:style>
+        <p:txBody>
+          <a:bodyPr rtlCol="0" anchor="ctr" wrap="square" lIns="73152" rIns="73152" tIns="36576" bIns="36576"/>
+          <a:lstStyle/>
+          <a:p>
+            <a:pPr algn="ctr"/>
+            <a:r>
+              <a:rPr sz="1200" b="0" i="0">
+                <a:solidFill>
+                  <a:srgbClr val="1F2D3D"/>
+                </a:solidFill>
+                <a:latin typeface="Calibri"/>
+              </a:rPr>
+              <a:t/>
+            </a:r>
+          </a:p>
+        </p:txBody>
+      </p:sp>
+      <p:sp>
+        <p:nvSpPr>
+          <p:cNvPr id="15" name="TextBox 14"/>
+          <p:cNvSpPr txBox="1"/>
+          <p:nvPr/>
+        </p:nvSpPr>
+        <p:spPr>
+          <a:xfrm>
+            <a:off x="530352" y="4910328"/>
+            <a:ext cx="1408176" cy="219456"/>
+          </a:xfrm>
+          <a:prstGeom prst="rect">
+            <a:avLst/>
+          </a:prstGeom>
+          <a:noFill/>
+        </p:spPr>
+        <p:txBody>
+          <a:bodyPr wrap="square" anchor="t">
+            <a:spAutoFit/>
+          </a:bodyPr>
+          <a:lstStyle/>
+          <a:p>
+            <a:pPr algn="l"/>
+            <a:r>
+              <a:rPr sz="950" b="1" i="0">
+                <a:solidFill>
+                  <a:srgbClr val="1F2D3D"/>
+                </a:solidFill>
+                <a:latin typeface="Calibri"/>
+              </a:rPr>
+              <a:t>Epic run (per theme)</a:t>
+            </a:r>
+          </a:p>
+        </p:txBody>
+      </p:sp>
+      <p:sp>
+        <p:nvSpPr>
+          <p:cNvPr id="16" name="TextBox 15"/>
+          <p:cNvSpPr txBox="1"/>
+          <p:nvPr/>
+        </p:nvSpPr>
+        <p:spPr>
+          <a:xfrm>
+            <a:off x="530352" y="5138928"/>
+            <a:ext cx="1408176" cy="466344"/>
+          </a:xfrm>
+          <a:prstGeom prst="rect">
+            <a:avLst/>
+          </a:prstGeom>
+          <a:noFill/>
+        </p:spPr>
+        <p:txBody>
+          <a:bodyPr wrap="square" anchor="t">
+            <a:spAutoFit/>
+          </a:bodyPr>
+          <a:lstStyle/>
+          <a:p>
+            <a:pPr algn="l"/>
+            <a:r>
+              <a:rPr sz="800" b="0" i="0">
+                <a:solidFill>
+                  <a:srgbClr val="1F2D3D"/>
+                </a:solidFill>
+                <a:latin typeface="Calibri"/>
+              </a:rPr>
+              <a:t>Re-cluster within each
+theme.  ~80–150 epics.</a:t>
+            </a:r>
+          </a:p>
+        </p:txBody>
+      </p:sp>
+      <p:sp>
+        <p:nvSpPr>
+          <p:cNvPr id="17" name="Rounded Rectangle 16"/>
+          <p:cNvSpPr/>
+          <p:nvPr/>
+        </p:nvSpPr>
+        <p:spPr>
+          <a:xfrm>
+            <a:off x="2194560" y="3017520"/>
+            <a:ext cx="1554480" cy="777240"/>
+          </a:xfrm>
+          <a:prstGeom prst="roundRect">
+            <a:avLst/>
+          </a:prstGeom>
+          <a:solidFill>
+            <a:srgbClr val="FAE9CB"/>
+          </a:solidFill>
+          <a:ln w="12700">
+            <a:solidFill>
+              <a:srgbClr val="C9952C"/>
+            </a:solidFill>
+          </a:ln>
+        </p:spPr>
+        <p:style>
+          <a:lnRef idx="1">
+            <a:schemeClr val="accent1"/>
+          </a:lnRef>
+          <a:fillRef idx="3">
+            <a:schemeClr val="accent1"/>
+          </a:fillRef>
+          <a:effectRef idx="2">
+            <a:schemeClr val="accent1"/>
+          </a:effectRef>
+          <a:fontRef idx="minor">
+            <a:schemeClr val="lt1"/>
+          </a:fontRef>
+        </p:style>
+        <p:txBody>
+          <a:bodyPr rtlCol="0" anchor="ctr" wrap="square" lIns="73152" rIns="73152" tIns="36576" bIns="36576"/>
+          <a:lstStyle/>
+          <a:p>
+            <a:pPr algn="ctr"/>
+            <a:r>
+              <a:rPr sz="1200" b="0" i="0">
+                <a:solidFill>
+                  <a:srgbClr val="1F2D3D"/>
+                </a:solidFill>
+                <a:latin typeface="Calibri"/>
+              </a:rPr>
+              <a:t/>
+            </a:r>
+          </a:p>
+        </p:txBody>
+      </p:sp>
+      <p:sp>
+        <p:nvSpPr>
+          <p:cNvPr id="18" name="TextBox 17"/>
+          <p:cNvSpPr txBox="1"/>
+          <p:nvPr/>
+        </p:nvSpPr>
+        <p:spPr>
+          <a:xfrm>
+            <a:off x="2267712" y="3063240"/>
+            <a:ext cx="1408176" cy="219456"/>
+          </a:xfrm>
+          <a:prstGeom prst="rect">
+            <a:avLst/>
+          </a:prstGeom>
+          <a:noFill/>
+        </p:spPr>
+        <p:txBody>
+          <a:bodyPr wrap="square" anchor="t">
+            <a:spAutoFit/>
+          </a:bodyPr>
+          <a:lstStyle/>
+          <a:p>
+            <a:pPr algn="l"/>
+            <a:r>
+              <a:rPr sz="950" b="1" i="0">
+                <a:solidFill>
+                  <a:srgbClr val="1F2D3D"/>
+                </a:solidFill>
+                <a:latin typeface="Calibri"/>
+              </a:rPr>
+              <a:t>Extract mentions (LLM)</a:t>
+            </a:r>
+          </a:p>
+        </p:txBody>
+      </p:sp>
+      <p:sp>
+        <p:nvSpPr>
+          <p:cNvPr id="19" name="TextBox 18"/>
+          <p:cNvSpPr txBox="1"/>
+          <p:nvPr/>
+        </p:nvSpPr>
+        <p:spPr>
+          <a:xfrm>
+            <a:off x="2267712" y="3291840"/>
+            <a:ext cx="1408176" cy="466344"/>
+          </a:xfrm>
+          <a:prstGeom prst="rect">
+            <a:avLst/>
+          </a:prstGeom>
+          <a:noFill/>
+        </p:spPr>
+        <p:txBody>
+          <a:bodyPr wrap="square" anchor="t">
+            <a:spAutoFit/>
+          </a:bodyPr>
+          <a:lstStyle/>
+          <a:p>
+            <a:pPr algn="l"/>
+            <a:r>
+              <a:rPr sz="800" b="0" i="0">
+                <a:solidFill>
+                  <a:srgbClr val="1F2D3D"/>
+                </a:solidFill>
+                <a:latin typeface="Calibri"/>
+              </a:rPr>
+              <a:t>Per chunk, pull named
+personas / tests.</a:t>
+            </a:r>
+          </a:p>
+        </p:txBody>
+      </p:sp>
+      <p:sp>
+        <p:nvSpPr>
+          <p:cNvPr id="20" name="Rounded Rectangle 19"/>
+          <p:cNvSpPr/>
+          <p:nvPr/>
+        </p:nvSpPr>
+        <p:spPr>
+          <a:xfrm>
+            <a:off x="2194560" y="3941064"/>
+            <a:ext cx="1554480" cy="777240"/>
           </a:xfrm>
           <a:prstGeom prst="roundRect">
             <a:avLst/>
@@ -11789,135 +12291,97 @@
           <a:p>
             <a:pPr algn="ctr"/>
             <a:r>
-              <a:rPr sz="1050" b="0" i="0">
-                <a:solidFill>
-                  <a:srgbClr val="1F2D3D"/>
-                </a:solidFill>
-                <a:latin typeface="Calibri"/>
-              </a:rPr>
-              <a:t>2. Embed + cluster chunks</a:t>
-            </a:r>
-          </a:p>
-        </p:txBody>
-      </p:sp>
-      <p:sp>
-        <p:nvSpPr>
-          <p:cNvPr id="9" name="Rounded Rectangle 8"/>
+              <a:rPr sz="1200" b="0" i="0">
+                <a:solidFill>
+                  <a:srgbClr val="1F2D3D"/>
+                </a:solidFill>
+                <a:latin typeface="Calibri"/>
+              </a:rPr>
+              <a:t/>
+            </a:r>
+          </a:p>
+        </p:txBody>
+      </p:sp>
+      <p:sp>
+        <p:nvSpPr>
+          <p:cNvPr id="21" name="TextBox 20"/>
+          <p:cNvSpPr txBox="1"/>
+          <p:nvPr/>
+        </p:nvSpPr>
+        <p:spPr>
+          <a:xfrm>
+            <a:off x="2267712" y="3986784"/>
+            <a:ext cx="1408176" cy="219456"/>
+          </a:xfrm>
+          <a:prstGeom prst="rect">
+            <a:avLst/>
+          </a:prstGeom>
+          <a:noFill/>
+        </p:spPr>
+        <p:txBody>
+          <a:bodyPr wrap="square" anchor="t">
+            <a:spAutoFit/>
+          </a:bodyPr>
+          <a:lstStyle/>
+          <a:p>
+            <a:pPr algn="l"/>
+            <a:r>
+              <a:rPr sz="950" b="1" i="0">
+                <a:solidFill>
+                  <a:srgbClr val="1F2D3D"/>
+                </a:solidFill>
+                <a:latin typeface="Calibri"/>
+              </a:rPr>
+              <a:t>Dedupe + admit</a:t>
+            </a:r>
+          </a:p>
+        </p:txBody>
+      </p:sp>
+      <p:sp>
+        <p:nvSpPr>
+          <p:cNvPr id="22" name="TextBox 21"/>
+          <p:cNvSpPr txBox="1"/>
+          <p:nvPr/>
+        </p:nvSpPr>
+        <p:spPr>
+          <a:xfrm>
+            <a:off x="2267712" y="4215384"/>
+            <a:ext cx="1408176" cy="466344"/>
+          </a:xfrm>
+          <a:prstGeom prst="rect">
+            <a:avLst/>
+          </a:prstGeom>
+          <a:noFill/>
+        </p:spPr>
+        <p:txBody>
+          <a:bodyPr wrap="square" anchor="t">
+            <a:spAutoFit/>
+          </a:bodyPr>
+          <a:lstStyle/>
+          <a:p>
+            <a:pPr algn="l"/>
+            <a:r>
+              <a:rPr sz="800" b="0" i="0">
+                <a:solidFill>
+                  <a:srgbClr val="1F2D3D"/>
+                </a:solidFill>
+                <a:latin typeface="Calibri"/>
+              </a:rPr>
+              <a:t>Merge near-duplicates;
+admit each unique entity.</a:t>
+            </a:r>
+          </a:p>
+        </p:txBody>
+      </p:sp>
+      <p:sp>
+        <p:nvSpPr>
+          <p:cNvPr id="23" name="Rounded Rectangle 22"/>
           <p:cNvSpPr/>
           <p:nvPr/>
         </p:nvSpPr>
         <p:spPr>
           <a:xfrm>
-            <a:off x="457200" y="3273552"/>
-            <a:ext cx="3291840" cy="384048"/>
-          </a:xfrm>
-          <a:prstGeom prst="roundRect">
-            <a:avLst/>
-          </a:prstGeom>
-          <a:solidFill>
-            <a:srgbClr val="FAE9CB"/>
-          </a:solidFill>
-          <a:ln w="12700">
-            <a:solidFill>
-              <a:srgbClr val="C9952C"/>
-            </a:solidFill>
-          </a:ln>
-        </p:spPr>
-        <p:style>
-          <a:lnRef idx="1">
-            <a:schemeClr val="accent1"/>
-          </a:lnRef>
-          <a:fillRef idx="3">
-            <a:schemeClr val="accent1"/>
-          </a:fillRef>
-          <a:effectRef idx="2">
-            <a:schemeClr val="accent1"/>
-          </a:effectRef>
-          <a:fontRef idx="minor">
-            <a:schemeClr val="lt1"/>
-          </a:fontRef>
-        </p:style>
-        <p:txBody>
-          <a:bodyPr rtlCol="0" anchor="ctr" wrap="square" lIns="73152" rIns="73152" tIns="36576" bIns="36576"/>
-          <a:lstStyle/>
-          <a:p>
-            <a:pPr algn="ctr"/>
-            <a:r>
-              <a:rPr sz="1050" b="1" i="0">
-                <a:solidFill>
-                  <a:srgbClr val="1F2D3D"/>
-                </a:solidFill>
-                <a:latin typeface="Calibri"/>
-              </a:rPr>
-              <a:t>3. Name each cluster (LLM)</a:t>
-            </a:r>
-          </a:p>
-        </p:txBody>
-      </p:sp>
-      <p:sp>
-        <p:nvSpPr>
-          <p:cNvPr id="10" name="Rounded Rectangle 9"/>
-          <p:cNvSpPr/>
-          <p:nvPr/>
-        </p:nvSpPr>
-        <p:spPr>
-          <a:xfrm>
-            <a:off x="457200" y="3822192"/>
-            <a:ext cx="3291840" cy="566928"/>
-          </a:xfrm>
-          <a:prstGeom prst="roundRect">
-            <a:avLst/>
-          </a:prstGeom>
-          <a:solidFill>
-            <a:srgbClr val="FAE9CB"/>
-          </a:solidFill>
-          <a:ln w="12700">
-            <a:solidFill>
-              <a:srgbClr val="C9952C"/>
-            </a:solidFill>
-          </a:ln>
-        </p:spPr>
-        <p:style>
-          <a:lnRef idx="1">
-            <a:schemeClr val="accent1"/>
-          </a:lnRef>
-          <a:fillRef idx="3">
-            <a:schemeClr val="accent1"/>
-          </a:fillRef>
-          <a:effectRef idx="2">
-            <a:schemeClr val="accent1"/>
-          </a:effectRef>
-          <a:fontRef idx="minor">
-            <a:schemeClr val="lt1"/>
-          </a:fontRef>
-        </p:style>
-        <p:txBody>
-          <a:bodyPr rtlCol="0" anchor="ctr" wrap="square" lIns="73152" rIns="73152" tIns="36576" bIns="36576"/>
-          <a:lstStyle/>
-          <a:p>
-            <a:pPr algn="ctr"/>
-            <a:r>
-              <a:rPr sz="1000" b="1" i="0">
-                <a:solidFill>
-                  <a:srgbClr val="1F2D3D"/>
-                </a:solidFill>
-                <a:latin typeface="Calibri"/>
-              </a:rPr>
-              <a:t>4. Admit via structured rubric
-(coherence + size + naming clarity)</a:t>
-            </a:r>
-          </a:p>
-        </p:txBody>
-      </p:sp>
-      <p:sp>
-        <p:nvSpPr>
-          <p:cNvPr id="11" name="Rounded Rectangle 10"/>
-          <p:cNvSpPr/>
-          <p:nvPr/>
-        </p:nvSpPr>
-        <p:spPr>
-          <a:xfrm>
-            <a:off x="457200" y="4572000"/>
+            <a:off x="457200" y="5824728"/>
             <a:ext cx="3291840" cy="384048"/>
           </a:xfrm>
           <a:prstGeom prst="roundRect">
@@ -11958,14 +12422,14 @@
                 </a:solidFill>
                 <a:latin typeface="Calibri"/>
               </a:rPr>
-              <a:t>Catalog YAML</a:t>
+              <a:t>Catalog YAML  (5 catalogs)</a:t>
             </a:r>
           </a:p>
         </p:txBody>
       </p:sp>
       <p:cxnSp>
         <p:nvCxnSpPr>
-          <p:cNvPr id="12" name="Connector 11"/>
+          <p:cNvPr id="24" name="Connector 23"/>
           <p:cNvCxnSpPr/>
           <p:nvPr/>
         </p:nvCxnSpPr>
@@ -12001,14 +12465,14 @@
       </p:cxnSp>
       <p:cxnSp>
         <p:nvCxnSpPr>
-          <p:cNvPr id="13" name="Connector 12"/>
+          <p:cNvPr id="25" name="Connector 24"/>
           <p:cNvCxnSpPr/>
           <p:nvPr/>
         </p:nvCxnSpPr>
         <p:spPr>
-          <a:xfrm>
-            <a:off x="2103120" y="2560320"/>
-            <a:ext cx="0" cy="164592"/>
+          <a:xfrm flipH="1">
+            <a:off x="1234440" y="2560320"/>
+            <a:ext cx="868680" cy="457200"/>
           </a:xfrm>
           <a:prstGeom prst="line">
             <a:avLst/>
@@ -12037,14 +12501,14 @@
       </p:cxnSp>
       <p:cxnSp>
         <p:nvCxnSpPr>
-          <p:cNvPr id="14" name="Connector 13"/>
+          <p:cNvPr id="26" name="Connector 25"/>
           <p:cNvCxnSpPr/>
           <p:nvPr/>
         </p:nvCxnSpPr>
         <p:spPr>
           <a:xfrm>
-            <a:off x="2103120" y="3108960"/>
-            <a:ext cx="0" cy="164592"/>
+            <a:off x="2103120" y="2560320"/>
+            <a:ext cx="868680" cy="457200"/>
           </a:xfrm>
           <a:prstGeom prst="line">
             <a:avLst/>
@@ -12073,14 +12537,14 @@
       </p:cxnSp>
       <p:cxnSp>
         <p:nvCxnSpPr>
-          <p:cNvPr id="15" name="Connector 14"/>
+          <p:cNvPr id="27" name="Connector 26"/>
           <p:cNvCxnSpPr/>
           <p:nvPr/>
         </p:nvCxnSpPr>
         <p:spPr>
           <a:xfrm>
-            <a:off x="2103120" y="3657600"/>
-            <a:ext cx="0" cy="164592"/>
+            <a:off x="1234440" y="3794760"/>
+            <a:ext cx="0" cy="146304"/>
           </a:xfrm>
           <a:prstGeom prst="line">
             <a:avLst/>
@@ -12109,14 +12573,14 @@
       </p:cxnSp>
       <p:cxnSp>
         <p:nvCxnSpPr>
-          <p:cNvPr id="16" name="Connector 15"/>
+          <p:cNvPr id="28" name="Connector 27"/>
           <p:cNvCxnSpPr/>
           <p:nvPr/>
         </p:nvCxnSpPr>
         <p:spPr>
           <a:xfrm>
-            <a:off x="2103120" y="4389120"/>
-            <a:ext cx="0" cy="182880"/>
+            <a:off x="1234440" y="4718304"/>
+            <a:ext cx="0" cy="146304"/>
           </a:xfrm>
           <a:prstGeom prst="line">
             <a:avLst/>
@@ -12143,16 +12607,124 @@
           </a:fontRef>
         </p:style>
       </p:cxnSp>
-      <p:sp>
-        <p:nvSpPr>
-          <p:cNvPr id="17" name="Rounded Rectangle 16"/>
+      <p:cxnSp>
+        <p:nvCxnSpPr>
+          <p:cNvPr id="29" name="Connector 28"/>
+          <p:cNvCxnSpPr/>
+          <p:nvPr/>
+        </p:nvCxnSpPr>
+        <p:spPr>
+          <a:xfrm>
+            <a:off x="2971800" y="3794760"/>
+            <a:ext cx="0" cy="146304"/>
+          </a:xfrm>
+          <a:prstGeom prst="line">
+            <a:avLst/>
+          </a:prstGeom>
+          <a:ln w="25400">
+            <a:solidFill>
+              <a:srgbClr val="4A6EA0"/>
+            </a:solidFill>
+            <a:tailEnd type="triangle" w="med" h="med"/>
+          </a:ln>
+        </p:spPr>
+        <p:style>
+          <a:lnRef idx="2">
+            <a:schemeClr val="accent1"/>
+          </a:lnRef>
+          <a:fillRef idx="0">
+            <a:schemeClr val="accent1"/>
+          </a:fillRef>
+          <a:effectRef idx="1">
+            <a:schemeClr val="accent1"/>
+          </a:effectRef>
+          <a:fontRef idx="minor">
+            <a:schemeClr val="tx1"/>
+          </a:fontRef>
+        </p:style>
+      </p:cxnSp>
+      <p:cxnSp>
+        <p:nvCxnSpPr>
+          <p:cNvPr id="30" name="Connector 29"/>
+          <p:cNvCxnSpPr/>
+          <p:nvPr/>
+        </p:nvCxnSpPr>
+        <p:spPr>
+          <a:xfrm>
+            <a:off x="1234440" y="5641848"/>
+            <a:ext cx="868680" cy="182880"/>
+          </a:xfrm>
+          <a:prstGeom prst="line">
+            <a:avLst/>
+          </a:prstGeom>
+          <a:ln w="25400">
+            <a:solidFill>
+              <a:srgbClr val="4A6EA0"/>
+            </a:solidFill>
+            <a:tailEnd type="triangle" w="med" h="med"/>
+          </a:ln>
+        </p:spPr>
+        <p:style>
+          <a:lnRef idx="2">
+            <a:schemeClr val="accent1"/>
+          </a:lnRef>
+          <a:fillRef idx="0">
+            <a:schemeClr val="accent1"/>
+          </a:fillRef>
+          <a:effectRef idx="1">
+            <a:schemeClr val="accent1"/>
+          </a:effectRef>
+          <a:fontRef idx="minor">
+            <a:schemeClr val="tx1"/>
+          </a:fontRef>
+        </p:style>
+      </p:cxnSp>
+      <p:cxnSp>
+        <p:nvCxnSpPr>
+          <p:cNvPr id="31" name="Connector 30"/>
+          <p:cNvCxnSpPr/>
+          <p:nvPr/>
+        </p:nvCxnSpPr>
+        <p:spPr>
+          <a:xfrm flipH="1">
+            <a:off x="2103120" y="4718304"/>
+            <a:ext cx="868680" cy="1106424"/>
+          </a:xfrm>
+          <a:prstGeom prst="line">
+            <a:avLst/>
+          </a:prstGeom>
+          <a:ln w="25400">
+            <a:solidFill>
+              <a:srgbClr val="4A6EA0"/>
+            </a:solidFill>
+            <a:tailEnd type="triangle" w="med" h="med"/>
+          </a:ln>
+        </p:spPr>
+        <p:style>
+          <a:lnRef idx="2">
+            <a:schemeClr val="accent1"/>
+          </a:lnRef>
+          <a:fillRef idx="0">
+            <a:schemeClr val="accent1"/>
+          </a:fillRef>
+          <a:effectRef idx="1">
+            <a:schemeClr val="accent1"/>
+          </a:effectRef>
+          <a:fontRef idx="minor">
+            <a:schemeClr val="tx1"/>
+          </a:fontRef>
+        </p:style>
+      </p:cxnSp>
+      <p:sp>
+        <p:nvSpPr>
+          <p:cNvPr id="32" name="Rounded Rectangle 31"/>
           <p:cNvSpPr/>
           <p:nvPr/>
         </p:nvSpPr>
         <p:spPr>
           <a:xfrm>
-            <a:off x="4023359" y="3986784"/>
-            <a:ext cx="2240280" cy="868680"/>
+            <a:off x="4023359" y="5824728"/>
+            <a:ext cx="2240280" cy="384048"/>
           </a:xfrm>
           <a:prstGeom prst="roundRect">
             <a:avLst/>
@@ -12199,14 +12771,14 @@
       </p:sp>
       <p:sp>
         <p:nvSpPr>
-          <p:cNvPr id="18" name="TextBox 17"/>
+          <p:cNvPr id="33" name="TextBox 32"/>
           <p:cNvSpPr txBox="1"/>
           <p:nvPr/>
         </p:nvSpPr>
         <p:spPr>
           <a:xfrm>
-            <a:off x="4114799" y="4059936"/>
-            <a:ext cx="2057400" cy="237744"/>
+            <a:off x="4114799" y="5861304"/>
+            <a:ext cx="2057400" cy="182880"/>
           </a:xfrm>
           <a:prstGeom prst="rect">
             <a:avLst/>
@@ -12221,7 +12793,7 @@
           <a:p>
             <a:pPr algn="l"/>
             <a:r>
-              <a:rPr sz="1100" b="1" i="0">
+              <a:rPr sz="1000" b="1" i="0">
                 <a:solidFill>
                   <a:srgbClr val="A84A4A"/>
                 </a:solidFill>
@@ -12234,14 +12806,14 @@
       </p:sp>
       <p:sp>
         <p:nvSpPr>
-          <p:cNvPr id="19" name="TextBox 18"/>
+          <p:cNvPr id="34" name="TextBox 33"/>
           <p:cNvSpPr txBox="1"/>
           <p:nvPr/>
         </p:nvSpPr>
         <p:spPr>
           <a:xfrm>
-            <a:off x="4114799" y="4315968"/>
-            <a:ext cx="2057400" cy="502920"/>
+            <a:off x="4114799" y="6025896"/>
+            <a:ext cx="2057400" cy="164592"/>
           </a:xfrm>
           <a:prstGeom prst="rect">
             <a:avLst/>
@@ -12256,28 +12828,27 @@
           <a:p>
             <a:pPr algn="l"/>
             <a:r>
-              <a:rPr sz="950" b="0" i="1">
-                <a:solidFill>
-                  <a:srgbClr val="1F2D3D"/>
-                </a:solidFill>
-                <a:latin typeface="Calibri"/>
-              </a:rPr>
-              <a:t>Low-confidence admits flagged for priority review.
-All admits already in catalog — review is post-hoc.</a:t>
+              <a:rPr sz="850" b="0" i="1">
+                <a:solidFill>
+                  <a:srgbClr val="1F2D3D"/>
+                </a:solidFill>
+                <a:latin typeface="Calibri"/>
+              </a:rPr>
+              <a:t>Low-conf admits (any level) flagged — pipeline never waits.</a:t>
             </a:r>
           </a:p>
         </p:txBody>
       </p:sp>
       <p:cxnSp>
         <p:nvCxnSpPr>
-          <p:cNvPr id="20" name="Connector 19"/>
+          <p:cNvPr id="35" name="Connector 34"/>
           <p:cNvCxnSpPr/>
           <p:nvPr/>
         </p:nvCxnSpPr>
         <p:spPr>
           <a:xfrm>
-            <a:off x="3758183" y="4105656"/>
-            <a:ext cx="256032" cy="315468"/>
+            <a:off x="3758183" y="6016752"/>
+            <a:ext cx="256032" cy="0"/>
           </a:xfrm>
           <a:prstGeom prst="line">
             <a:avLst/>
@@ -12306,102 +12877,7 @@
       </p:cxnSp>
       <p:sp>
         <p:nvSpPr>
-          <p:cNvPr id="21" name="Rounded Rectangle 20"/>
-          <p:cNvSpPr/>
-          <p:nvPr/>
-        </p:nvSpPr>
-        <p:spPr>
-          <a:xfrm>
-            <a:off x="4023359" y="2679192"/>
-            <a:ext cx="2240280" cy="1280160"/>
-          </a:xfrm>
-          <a:prstGeom prst="roundRect">
-            <a:avLst/>
-          </a:prstGeom>
-          <a:solidFill>
-            <a:srgbClr val="ECF4E8"/>
-          </a:solidFill>
-          <a:ln w="12700">
-            <a:solidFill>
-              <a:srgbClr val="5C8347"/>
-            </a:solidFill>
-          </a:ln>
-        </p:spPr>
-        <p:style>
-          <a:lnRef idx="1">
-            <a:schemeClr val="accent1"/>
-          </a:lnRef>
-          <a:fillRef idx="3">
-            <a:schemeClr val="accent1"/>
-          </a:fillRef>
-          <a:effectRef idx="2">
-            <a:schemeClr val="accent1"/>
-          </a:effectRef>
-          <a:fontRef idx="minor">
-            <a:schemeClr val="lt1"/>
-          </a:fontRef>
-        </p:style>
-        <p:txBody>
-          <a:bodyPr rtlCol="0" anchor="ctr" wrap="square" lIns="73152" rIns="73152" tIns="36576" bIns="36576"/>
-          <a:lstStyle/>
-          <a:p>
-            <a:pPr algn="l"/>
-            <a:r>
-              <a:rPr sz="950" b="0" i="0">
-                <a:solidFill>
-                  <a:srgbClr val="1F2D3D"/>
-                </a:solidFill>
-                <a:latin typeface="Calibri"/>
-              </a:rPr>
-              <a:t>Discovery mode (per run):
-  capability → top-level outcomes
-  theme      → broad topic clusters
-  epic       → narrow topic clusters
-  persona    → named-actor extraction
-  test       → named-test extraction</a:t>
-            </a:r>
-          </a:p>
-        </p:txBody>
-      </p:sp>
-      <p:cxnSp>
-        <p:nvCxnSpPr>
-          <p:cNvPr id="22" name="Connector 21"/>
-          <p:cNvCxnSpPr/>
-          <p:nvPr/>
-        </p:nvCxnSpPr>
-        <p:spPr>
-          <a:xfrm>
-            <a:off x="3758183" y="3465576"/>
-            <a:ext cx="256032" cy="0"/>
-          </a:xfrm>
-          <a:prstGeom prst="line">
-            <a:avLst/>
-          </a:prstGeom>
-          <a:ln w="15875">
-            <a:solidFill>
-              <a:srgbClr val="5C8347"/>
-            </a:solidFill>
-            <a:tailEnd type="triangle" w="med" h="med"/>
-          </a:ln>
-        </p:spPr>
-        <p:style>
-          <a:lnRef idx="2">
-            <a:schemeClr val="accent1"/>
-          </a:lnRef>
-          <a:fillRef idx="0">
-            <a:schemeClr val="accent1"/>
-          </a:fillRef>
-          <a:effectRef idx="1">
-            <a:schemeClr val="accent1"/>
-          </a:effectRef>
-          <a:fontRef idx="minor">
-            <a:schemeClr val="tx1"/>
-          </a:fontRef>
-        </p:style>
-      </p:cxnSp>
-      <p:sp>
-        <p:nvSpPr>
-          <p:cNvPr id="23" name="TextBox 22"/>
+          <p:cNvPr id="36" name="TextBox 35"/>
           <p:cNvSpPr txBox="1"/>
           <p:nvPr/>
         </p:nvSpPr>
@@ -12429,14 +12905,14 @@
                 </a:solidFill>
                 <a:latin typeface="Calibri"/>
               </a:rPr>
-              <a:t>Phase 1 outputs — 5 catalogs (run 5 times)</a:t>
-            </a:r>
-          </a:p>
-        </p:txBody>
-      </p:sp>
-      <p:sp>
-        <p:nvSpPr>
-          <p:cNvPr id="24" name="Rounded Rectangle 23"/>
+              <a:t>Phase 1 outputs — 5 catalogs (3 cascade + 2 entity)</a:t>
+            </a:r>
+          </a:p>
+        </p:txBody>
+      </p:sp>
+      <p:sp>
+        <p:nvSpPr>
+          <p:cNvPr id="37" name="Rounded Rectangle 36"/>
           <p:cNvSpPr/>
           <p:nvPr/>
         </p:nvSpPr>
@@ -12490,7 +12966,7 @@
       </p:sp>
       <p:sp>
         <p:nvSpPr>
-          <p:cNvPr id="25" name="TextBox 24"/>
+          <p:cNvPr id="38" name="TextBox 37"/>
           <p:cNvSpPr txBox="1"/>
           <p:nvPr/>
         </p:nvSpPr>
@@ -12525,7 +13001,7 @@
       </p:sp>
       <p:sp>
         <p:nvSpPr>
-          <p:cNvPr id="26" name="TextBox 25"/>
+          <p:cNvPr id="39" name="TextBox 38"/>
           <p:cNvSpPr txBox="1"/>
           <p:nvPr/>
         </p:nvSpPr>
@@ -12560,7 +13036,7 @@
       </p:sp>
       <p:sp>
         <p:nvSpPr>
-          <p:cNvPr id="27" name="TextBox 26"/>
+          <p:cNvPr id="40" name="TextBox 39"/>
           <p:cNvSpPr txBox="1"/>
           <p:nvPr/>
         </p:nvSpPr>
@@ -12588,14 +13064,14 @@
                 </a:solidFill>
                 <a:latin typeface="Calibri"/>
               </a:rPr>
-              <a:t>key · label · desc · n_themes · confidence</a:t>
-            </a:r>
-          </a:p>
-        </p:txBody>
-      </p:sp>
-      <p:sp>
-        <p:nvSpPr>
-          <p:cNvPr id="28" name="Rounded Rectangle 27"/>
+              <a:t>key · label · desc · n_themes · admit_confidence</a:t>
+            </a:r>
+          </a:p>
+        </p:txBody>
+      </p:sp>
+      <p:sp>
+        <p:nvSpPr>
+          <p:cNvPr id="41" name="Rounded Rectangle 40"/>
           <p:cNvSpPr/>
           <p:nvPr/>
         </p:nvSpPr>
@@ -12649,7 +13125,7 @@
       </p:sp>
       <p:sp>
         <p:nvSpPr>
-          <p:cNvPr id="29" name="TextBox 28"/>
+          <p:cNvPr id="42" name="TextBox 41"/>
           <p:cNvSpPr txBox="1"/>
           <p:nvPr/>
         </p:nvSpPr>
@@ -12684,7 +13160,7 @@
       </p:sp>
       <p:sp>
         <p:nvSpPr>
-          <p:cNvPr id="30" name="TextBox 29"/>
+          <p:cNvPr id="43" name="TextBox 42"/>
           <p:cNvSpPr txBox="1"/>
           <p:nvPr/>
         </p:nvSpPr>
@@ -12719,7 +13195,7 @@
       </p:sp>
       <p:sp>
         <p:nvSpPr>
-          <p:cNvPr id="31" name="TextBox 30"/>
+          <p:cNvPr id="44" name="TextBox 43"/>
           <p:cNvSpPr txBox="1"/>
           <p:nvPr/>
         </p:nvSpPr>
@@ -12747,14 +13223,14 @@
                 </a:solidFill>
                 <a:latin typeface="Calibri"/>
               </a:rPr>
-              <a:t>key · label · capability_ref · n_chunks · n_sops · confidence</a:t>
-            </a:r>
-          </a:p>
-        </p:txBody>
-      </p:sp>
-      <p:sp>
-        <p:nvSpPr>
-          <p:cNvPr id="32" name="Rounded Rectangle 31"/>
+              <a:t>key · label · capability_ref · n_chunks · n_sops · admit_confidence</a:t>
+            </a:r>
+          </a:p>
+        </p:txBody>
+      </p:sp>
+      <p:sp>
+        <p:nvSpPr>
+          <p:cNvPr id="45" name="Rounded Rectangle 44"/>
           <p:cNvSpPr/>
           <p:nvPr/>
         </p:nvSpPr>
@@ -12808,7 +13284,7 @@
       </p:sp>
       <p:sp>
         <p:nvSpPr>
-          <p:cNvPr id="33" name="TextBox 32"/>
+          <p:cNvPr id="46" name="TextBox 45"/>
           <p:cNvSpPr txBox="1"/>
           <p:nvPr/>
         </p:nvSpPr>
@@ -12843,7 +13319,7 @@
       </p:sp>
       <p:sp>
         <p:nvSpPr>
-          <p:cNvPr id="34" name="TextBox 33"/>
+          <p:cNvPr id="47" name="TextBox 46"/>
           <p:cNvSpPr txBox="1"/>
           <p:nvPr/>
         </p:nvSpPr>
@@ -12878,7 +13354,7 @@
       </p:sp>
       <p:sp>
         <p:nvSpPr>
-          <p:cNvPr id="35" name="TextBox 34"/>
+          <p:cNvPr id="48" name="TextBox 47"/>
           <p:cNvSpPr txBox="1"/>
           <p:nvPr/>
         </p:nvSpPr>
@@ -12906,14 +13382,14 @@
                 </a:solidFill>
                 <a:latin typeface="Calibri"/>
               </a:rPr>
-              <a:t>key · label · theme_ref · n_sops · confidence</a:t>
-            </a:r>
-          </a:p>
-        </p:txBody>
-      </p:sp>
-      <p:sp>
-        <p:nvSpPr>
-          <p:cNvPr id="36" name="Rounded Rectangle 35"/>
+              <a:t>key · label · theme_ref · n_sops · admit_confidence</a:t>
+            </a:r>
+          </a:p>
+        </p:txBody>
+      </p:sp>
+      <p:sp>
+        <p:nvSpPr>
+          <p:cNvPr id="49" name="Rounded Rectangle 48"/>
           <p:cNvSpPr/>
           <p:nvPr/>
         </p:nvSpPr>
@@ -12967,7 +13443,7 @@
       </p:sp>
       <p:sp>
         <p:nvSpPr>
-          <p:cNvPr id="37" name="TextBox 36"/>
+          <p:cNvPr id="50" name="TextBox 49"/>
           <p:cNvSpPr txBox="1"/>
           <p:nvPr/>
         </p:nvSpPr>
@@ -13002,7 +13478,7 @@
       </p:sp>
       <p:sp>
         <p:nvSpPr>
-          <p:cNvPr id="38" name="TextBox 37"/>
+          <p:cNvPr id="51" name="TextBox 50"/>
           <p:cNvSpPr txBox="1"/>
           <p:nvPr/>
         </p:nvSpPr>
@@ -13037,7 +13513,7 @@
       </p:sp>
       <p:sp>
         <p:nvSpPr>
-          <p:cNvPr id="39" name="TextBox 38"/>
+          <p:cNvPr id="52" name="TextBox 51"/>
           <p:cNvSpPr txBox="1"/>
           <p:nvPr/>
         </p:nvSpPr>
@@ -13065,14 +13541,14 @@
                 </a:solidFill>
                 <a:latin typeface="Calibri"/>
               </a:rPr>
-              <a:t>key · label · actor_type · n_mentions · confidence</a:t>
-            </a:r>
-          </a:p>
-        </p:txBody>
-      </p:sp>
-      <p:sp>
-        <p:nvSpPr>
-          <p:cNvPr id="40" name="Rounded Rectangle 39"/>
+              <a:t>key · label · actor_type · n_mentions · admit_confidence</a:t>
+            </a:r>
+          </a:p>
+        </p:txBody>
+      </p:sp>
+      <p:sp>
+        <p:nvSpPr>
+          <p:cNvPr id="53" name="Rounded Rectangle 52"/>
           <p:cNvSpPr/>
           <p:nvPr/>
         </p:nvSpPr>
@@ -13126,7 +13602,7 @@
       </p:sp>
       <p:sp>
         <p:nvSpPr>
-          <p:cNvPr id="41" name="TextBox 40"/>
+          <p:cNvPr id="54" name="TextBox 53"/>
           <p:cNvSpPr txBox="1"/>
           <p:nvPr/>
         </p:nvSpPr>
@@ -13161,7 +13637,7 @@
       </p:sp>
       <p:sp>
         <p:nvSpPr>
-          <p:cNvPr id="42" name="TextBox 41"/>
+          <p:cNvPr id="55" name="TextBox 54"/>
           <p:cNvSpPr txBox="1"/>
           <p:nvPr/>
         </p:nvSpPr>
@@ -13196,7 +13672,7 @@
       </p:sp>
       <p:sp>
         <p:nvSpPr>
-          <p:cNvPr id="43" name="TextBox 42"/>
+          <p:cNvPr id="56" name="TextBox 55"/>
           <p:cNvSpPr txBox="1"/>
           <p:nvPr/>
         </p:nvSpPr>
@@ -13224,14 +13700,14 @@
                 </a:solidFill>
                 <a:latin typeface="Calibri"/>
               </a:rPr>
-              <a:t>key · label · n_sops · confidence</a:t>
-            </a:r>
-          </a:p>
-        </p:txBody>
-      </p:sp>
-      <p:sp>
-        <p:nvSpPr>
-          <p:cNvPr id="44" name="Rounded Rectangle 43"/>
+              <a:t>key · label · n_sops · admit_confidence</a:t>
+            </a:r>
+          </a:p>
+        </p:txBody>
+      </p:sp>
+      <p:sp>
+        <p:nvSpPr>
+          <p:cNvPr id="57" name="Rounded Rectangle 56"/>
           <p:cNvSpPr/>
           <p:nvPr/>
         </p:nvSpPr>
@@ -13278,14 +13754,14 @@
                 </a:solidFill>
                 <a:latin typeface="Calibri"/>
               </a:rPr>
-              <a:t>Unclassified bucket on every catalog holds chunks that did not cluster cleanly. Surfaced for review, not lost.</a:t>
-            </a:r>
-          </a:p>
-        </p:txBody>
-      </p:sp>
-      <p:sp>
-        <p:nvSpPr>
-          <p:cNvPr id="45" name="Rectangle 44"/>
+              <a:t>Unclassified bucket on each taxonomy catalog (capability / theme / epic) holds chunks that did not cluster cleanly. Surfaced for review, not lost.</a:t>
+            </a:r>
+          </a:p>
+        </p:txBody>
+      </p:sp>
+      <p:sp>
+        <p:nvSpPr>
+          <p:cNvPr id="58" name="Rectangle 57"/>
           <p:cNvSpPr/>
           <p:nvPr/>
         </p:nvSpPr>
@@ -13328,7 +13804,7 @@
       </p:sp>
       <p:sp>
         <p:nvSpPr>
-          <p:cNvPr id="46" name="TextBox 45"/>
+          <p:cNvPr id="59" name="TextBox 58"/>
           <p:cNvSpPr txBox="1"/>
           <p:nvPr/>
         </p:nvSpPr>
@@ -13363,7 +13839,7 @@
       </p:sp>
       <p:sp>
         <p:nvSpPr>
-          <p:cNvPr id="47" name="TextBox 46"/>
+          <p:cNvPr id="60" name="TextBox 59"/>
           <p:cNvSpPr txBox="1"/>
           <p:nvPr/>
         </p:nvSpPr>
@@ -13535,7 +14011,7 @@
         </p:nvSpPr>
         <p:spPr>
           <a:xfrm>
-            <a:off x="457200" y="1143000"/>
+            <a:off x="457200" y="1371600"/>
             <a:ext cx="11274552" cy="256032"/>
           </a:xfrm>
           <a:prstGeom prst="rect">
@@ -13570,8 +14046,8 @@
         </p:nvSpPr>
         <p:spPr>
           <a:xfrm>
-            <a:off x="457200" y="1417320"/>
-            <a:ext cx="11274552" cy="1143000"/>
+            <a:off x="457200" y="1645920"/>
+            <a:ext cx="11274552" cy="1005840"/>
           </a:xfrm>
           <a:prstGeom prst="rect">
             <a:avLst/>
@@ -13679,7 +14155,7 @@
                 </a:solidFill>
                 <a:latin typeface="Consolas"/>
               </a:rPr>
-              <a:t>  - {key: specimen_lifecycle, label: "Specimen Lifecycle Management", desc: "Intake, routing, QC, disposal", n_themes: 4, confidence: 0.91}</a:t>
+              <a:t>  - {key: specimen_lifecycle, label: "Specimen Lifecycle Management", desc: "Intake, routing, QC (Quality Control), disposal", n_themes: 4, admit_confidence: 0.91}</a:t>
             </a:r>
           </a:p>
           <a:p>
@@ -13695,7 +14171,7 @@
                 </a:solidFill>
                 <a:latin typeface="Consolas"/>
               </a:rPr>
-              <a:t>  - {key: diagnostic_execution, label: "Diagnostic Test Execution", n_themes: 5, confidence: 0.88}</a:t>
+              <a:t>  - {key: diagnostic_execution, label: "Diagnostic Test Execution", n_themes: 5, admit_confidence: 0.88}</a:t>
             </a:r>
           </a:p>
           <a:p>
@@ -13711,7 +14187,7 @@
                 </a:solidFill>
                 <a:latin typeface="Consolas"/>
               </a:rPr>
-              <a:t>  - {key: result_delivery, label: "Result Reporting &amp; Delivery", n_themes: 3, confidence: 0.93}</a:t>
+              <a:t>  - {key: result_delivery, label: "Result Reporting &amp; Delivery", n_themes: 3, admit_confidence: 0.93}</a:t>
             </a:r>
           </a:p>
           <a:p>
@@ -13740,7 +14216,7 @@
         </p:nvSpPr>
         <p:spPr>
           <a:xfrm>
-            <a:off x="457200" y="2423160"/>
+            <a:off x="457200" y="2514600"/>
             <a:ext cx="5545836" cy="256032"/>
           </a:xfrm>
           <a:prstGeom prst="rect">
@@ -13775,8 +14251,8 @@
         </p:nvSpPr>
         <p:spPr>
           <a:xfrm>
-            <a:off x="457200" y="2697479"/>
-            <a:ext cx="5545836" cy="1828800"/>
+            <a:off x="457200" y="2788920"/>
+            <a:ext cx="5545836" cy="1783080"/>
           </a:xfrm>
           <a:prstGeom prst="rect">
             <a:avLst/>
@@ -13932,7 +14408,7 @@
                 </a:solidFill>
                 <a:latin typeface="Consolas"/>
               </a:rPr>
-              <a:t>    desc: Intake, routing, QC</a:t>
+              <a:t>    desc: Intake, routing, QC (Quality Control)</a:t>
             </a:r>
           </a:p>
           <a:p>
@@ -13980,7 +14456,7 @@
                 </a:solidFill>
                 <a:latin typeface="Consolas"/>
               </a:rPr>
-              <a:t>    confidence: 0.92</a:t>
+              <a:t>    admit_confidence: 0.92</a:t>
             </a:r>
           </a:p>
           <a:p>
@@ -13996,7 +14472,7 @@
                 </a:solidFill>
                 <a:latin typeface="Consolas"/>
               </a:rPr>
-              <a:t>  - {key: culture_setup, label: "Culture setup", capability_ref: diagnostic_execution, n_sops: 18, confidence: 0.88}</a:t>
+              <a:t>  - {key: culture_setup, label: "Culture setup", capability_ref: diagnostic_execution, n_sops: 18, admit_confidence: 0.88}</a:t>
             </a:r>
           </a:p>
           <a:p>
@@ -14012,7 +14488,7 @@
                 </a:solidFill>
                 <a:latin typeface="Consolas"/>
               </a:rPr>
-              <a:t>  - {key: result_review, label: "Result review", capability_ref: result_delivery, n_sops: 24, confidence: 0.90}</a:t>
+              <a:t>  - {key: result_review, label: "Result review", capability_ref: result_delivery, n_sops: 24, admit_confidence: 0.90}</a:t>
             </a:r>
           </a:p>
           <a:p>
@@ -14041,7 +14517,7 @@
         </p:nvSpPr>
         <p:spPr>
           <a:xfrm>
-            <a:off x="6185916" y="2423160"/>
+            <a:off x="6185916" y="2514600"/>
             <a:ext cx="5545836" cy="256032"/>
           </a:xfrm>
           <a:prstGeom prst="rect">
@@ -14076,8 +14552,8 @@
         </p:nvSpPr>
         <p:spPr>
           <a:xfrm>
-            <a:off x="6185916" y="2697479"/>
-            <a:ext cx="5545836" cy="1828800"/>
+            <a:off x="6185916" y="2788920"/>
+            <a:ext cx="5545836" cy="1783080"/>
           </a:xfrm>
           <a:prstGeom prst="rect">
             <a:avLst/>
@@ -14265,7 +14741,7 @@
                 </a:solidFill>
                 <a:latin typeface="Consolas"/>
               </a:rPr>
-              <a:t>    confidence: 0.88</a:t>
+              <a:t>    admit_confidence: 0.88</a:t>
             </a:r>
           </a:p>
           <a:p>
@@ -14281,7 +14757,7 @@
                 </a:solidFill>
                 <a:latin typeface="Consolas"/>
               </a:rPr>
-              <a:t>  - {key: gram_stain_prep, label: "Gram stain prep", theme_ref: culture_setup, n_sops: 14, confidence: 0.91}</a:t>
+              <a:t>  - {key: gram_stain_prep, label: "Gram stain prep", theme_ref: culture_setup, n_sops: 14, admit_confidence: 0.91}</a:t>
             </a:r>
           </a:p>
           <a:p>
@@ -14297,7 +14773,7 @@
                 </a:solidFill>
                 <a:latin typeface="Consolas"/>
               </a:rPr>
-              <a:t>  - {key: result_sign_off, label: "Result sign-off", theme_ref: result_review, n_sops: 24, confidence: 0.85}</a:t>
+              <a:t>  - {key: result_sign_off, label: "Result sign-off", theme_ref: result_review, n_sops: 24, admit_confidence: 0.85}</a:t>
             </a:r>
           </a:p>
           <a:p>
@@ -14326,7 +14802,7 @@
         </p:nvSpPr>
         <p:spPr>
           <a:xfrm>
-            <a:off x="457200" y="4389120"/>
+            <a:off x="457200" y="4434840"/>
             <a:ext cx="5545836" cy="256032"/>
           </a:xfrm>
           <a:prstGeom prst="rect">
@@ -14361,8 +14837,8 @@
         </p:nvSpPr>
         <p:spPr>
           <a:xfrm>
-            <a:off x="457200" y="4663440"/>
-            <a:ext cx="5545836" cy="1828800"/>
+            <a:off x="457200" y="4709160"/>
+            <a:ext cx="5545836" cy="1783080"/>
           </a:xfrm>
           <a:prstGeom prst="rect">
             <a:avLst/>
@@ -14406,7 +14882,7 @@
                 </a:solidFill>
                 <a:latin typeface="Consolas"/>
               </a:rPr>
-              <a:t>catalog: persona_v1</a:t>
+              <a:t>catalog: persona_v1     # named actors discovered in SOPs</a:t>
             </a:r>
           </a:p>
           <a:p>
@@ -14550,7 +15026,7 @@
                 </a:solidFill>
                 <a:latin typeface="Consolas"/>
               </a:rPr>
-              <a:t>    confidence: 0.95</a:t>
+              <a:t>    admit_confidence: 0.95</a:t>
             </a:r>
           </a:p>
           <a:p>
@@ -14566,7 +15042,7 @@
                 </a:solidFill>
                 <a:latin typeface="Consolas"/>
               </a:rPr>
-              <a:t>  - {key: lab_assistant, label: "Lab assistant", actor_type: human, n_mentions: 91, confidence: 0.93}</a:t>
+              <a:t>  - {key: lab_assistant, label: "Lab assistant", actor_type: human, n_mentions: 91, admit_confidence: 0.93}</a:t>
             </a:r>
           </a:p>
           <a:p>
@@ -14582,7 +15058,7 @@
                 </a:solidFill>
                 <a:latin typeface="Consolas"/>
               </a:rPr>
-              <a:t>  - {key: lims, label: "LIMS", actor_type: system, n_mentions: 134, confidence: 0.97}</a:t>
+              <a:t>  - {key: lims, label: "LIMS (Laboratory Information Management System)", actor_type: system, n_mentions: 134, admit_confidence: 0.97}</a:t>
             </a:r>
           </a:p>
           <a:p>
@@ -14598,7 +15074,7 @@
                 </a:solidFill>
                 <a:latin typeface="Consolas"/>
               </a:rPr>
-              <a:t>  - {key: emr, label: "EMR", actor_type: external_system, n_mentions: 28, confidence: 0.86}</a:t>
+              <a:t>  - {key: emr, label: "EMR (Electronic Medical Record)", actor_type: external_system, n_mentions: 28, admit_confidence: 0.86}</a:t>
             </a:r>
           </a:p>
         </p:txBody>
@@ -14611,7 +15087,7 @@
         </p:nvSpPr>
         <p:spPr>
           <a:xfrm>
-            <a:off x="6185916" y="4389120"/>
+            <a:off x="6185916" y="4434840"/>
             <a:ext cx="5545836" cy="256032"/>
           </a:xfrm>
           <a:prstGeom prst="rect">
@@ -14646,8 +15122,8 @@
         </p:nvSpPr>
         <p:spPr>
           <a:xfrm>
-            <a:off x="6185916" y="4663440"/>
-            <a:ext cx="5545836" cy="1828800"/>
+            <a:off x="6185916" y="4709160"/>
+            <a:ext cx="5545836" cy="1783080"/>
           </a:xfrm>
           <a:prstGeom prst="rect">
             <a:avLst/>
@@ -14819,7 +15295,7 @@
                 </a:solidFill>
                 <a:latin typeface="Consolas"/>
               </a:rPr>
-              <a:t>    confidence: 0.91</a:t>
+              <a:t>    admit_confidence: 0.91</a:t>
             </a:r>
           </a:p>
           <a:p>
@@ -14835,7 +15311,7 @@
                 </a:solidFill>
                 <a:latin typeface="Consolas"/>
               </a:rPr>
-              <a:t>  - {key: urine_culture, label: "Urine culture", n_sops: 9, confidence: 0.89}</a:t>
+              <a:t>  - {key: urine_culture, label: "Urine culture", n_sops: 9, admit_confidence: 0.89}</a:t>
             </a:r>
           </a:p>
           <a:p>
@@ -14851,7 +15327,7 @@
                 </a:solidFill>
                 <a:latin typeface="Consolas"/>
               </a:rPr>
-              <a:t>  - {key: gram_stain, label: "Gram stain", n_sops: 14, confidence: 0.94}</a:t>
+              <a:t>  - {key: gram_stain, label: "Gram stain", n_sops: 14, admit_confidence: 0.94}</a:t>
             </a:r>
           </a:p>
           <a:p>
@@ -14867,7 +15343,7 @@
                 </a:solidFill>
                 <a:latin typeface="Consolas"/>
               </a:rPr>
-              <a:t>  - {key: ast, label: "AST", n_sops: 7, confidence: 0.82}</a:t>
+              <a:t>  - {key: ast, label: "AST (Antimicrobial Susceptibility Testing)", n_sops: 7, admit_confidence: 0.82}</a:t>
             </a:r>
           </a:p>
         </p:txBody>
@@ -15442,7 +15918,42 @@
       </p:sp>
       <p:sp>
         <p:nvSpPr>
-          <p:cNvPr id="12" name="Rounded Rectangle 11"/>
+          <p:cNvPr id="12" name="TextBox 11"/>
+          <p:cNvSpPr txBox="1"/>
+          <p:nvPr/>
+        </p:nvSpPr>
+        <p:spPr>
+          <a:xfrm>
+            <a:off x="1234440" y="3941064"/>
+            <a:ext cx="4206240" cy="164592"/>
+          </a:xfrm>
+          <a:prstGeom prst="rect">
+            <a:avLst/>
+          </a:prstGeom>
+          <a:noFill/>
+        </p:spPr>
+        <p:txBody>
+          <a:bodyPr wrap="square" anchor="t">
+            <a:spAutoFit/>
+          </a:bodyPr>
+          <a:lstStyle/>
+          <a:p>
+            <a:pPr algn="ctr"/>
+            <a:r>
+              <a:rPr sz="800" b="0" i="1">
+                <a:solidFill>
+                  <a:srgbClr val="55606E"/>
+                </a:solidFill>
+                <a:latin typeface="Calibri"/>
+              </a:rPr>
+              <a:t>+ theme_ref / epic_ref inherited from Phase 1 cascade buckets (no LLM call)</a:t>
+            </a:r>
+          </a:p>
+        </p:txBody>
+      </p:sp>
+      <p:sp>
+        <p:nvSpPr>
+          <p:cNvPr id="13" name="Rounded Rectangle 12"/>
           <p:cNvSpPr/>
           <p:nvPr/>
         </p:nvSpPr>
@@ -15497,49 +16008,13 @@
       </p:sp>
       <p:cxnSp>
         <p:nvCxnSpPr>
-          <p:cNvPr id="13" name="Connector 12"/>
-          <p:cNvCxnSpPr/>
-          <p:nvPr/>
-        </p:nvCxnSpPr>
-        <p:spPr>
-          <a:xfrm>
-            <a:off x="3337559" y="3931920"/>
-            <a:ext cx="0" cy="182880"/>
-          </a:xfrm>
-          <a:prstGeom prst="line">
-            <a:avLst/>
-          </a:prstGeom>
-          <a:ln w="25400">
-            <a:solidFill>
-              <a:srgbClr val="4A6EA0"/>
-            </a:solidFill>
-            <a:tailEnd type="triangle" w="med" h="med"/>
-          </a:ln>
-        </p:spPr>
-        <p:style>
-          <a:lnRef idx="2">
-            <a:schemeClr val="accent1"/>
-          </a:lnRef>
-          <a:fillRef idx="0">
-            <a:schemeClr val="accent1"/>
-          </a:fillRef>
-          <a:effectRef idx="1">
-            <a:schemeClr val="accent1"/>
-          </a:effectRef>
-          <a:fontRef idx="minor">
-            <a:schemeClr val="tx1"/>
-          </a:fontRef>
-        </p:style>
-      </p:cxnSp>
-      <p:cxnSp>
-        <p:nvCxnSpPr>
           <p:cNvPr id="14" name="Connector 13"/>
           <p:cNvCxnSpPr/>
           <p:nvPr/>
         </p:nvCxnSpPr>
         <p:spPr>
           <a:xfrm>
-            <a:off x="3337559" y="2331720"/>
+            <a:off x="3337559" y="3931920"/>
             <a:ext cx="0" cy="182880"/>
           </a:xfrm>
           <a:prstGeom prst="line">
@@ -15575,8 +16050,8 @@
         </p:nvCxnSpPr>
         <p:spPr>
           <a:xfrm>
-            <a:off x="3337559" y="2926080"/>
-            <a:ext cx="0" cy="274320"/>
+            <a:off x="3337559" y="2331720"/>
+            <a:ext cx="0" cy="182880"/>
           </a:xfrm>
           <a:prstGeom prst="line">
             <a:avLst/>
@@ -15603,9 +16078,45 @@
           </a:fontRef>
         </p:style>
       </p:cxnSp>
-      <p:sp>
-        <p:nvSpPr>
-          <p:cNvPr id="16" name="Rounded Rectangle 15"/>
+      <p:cxnSp>
+        <p:nvCxnSpPr>
+          <p:cNvPr id="16" name="Connector 15"/>
+          <p:cNvCxnSpPr/>
+          <p:nvPr/>
+        </p:nvCxnSpPr>
+        <p:spPr>
+          <a:xfrm>
+            <a:off x="3337559" y="2926080"/>
+            <a:ext cx="0" cy="274320"/>
+          </a:xfrm>
+          <a:prstGeom prst="line">
+            <a:avLst/>
+          </a:prstGeom>
+          <a:ln w="25400">
+            <a:solidFill>
+              <a:srgbClr val="4A6EA0"/>
+            </a:solidFill>
+            <a:tailEnd type="triangle" w="med" h="med"/>
+          </a:ln>
+        </p:spPr>
+        <p:style>
+          <a:lnRef idx="2">
+            <a:schemeClr val="accent1"/>
+          </a:lnRef>
+          <a:fillRef idx="0">
+            <a:schemeClr val="accent1"/>
+          </a:fillRef>
+          <a:effectRef idx="1">
+            <a:schemeClr val="accent1"/>
+          </a:effectRef>
+          <a:fontRef idx="minor">
+            <a:schemeClr val="tx1"/>
+          </a:fontRef>
+        </p:style>
+      </p:cxnSp>
+      <p:sp>
+        <p:nvSpPr>
+          <p:cNvPr id="17" name="Rounded Rectangle 16"/>
           <p:cNvSpPr/>
           <p:nvPr/>
         </p:nvSpPr>
@@ -15659,7 +16170,7 @@
       </p:sp>
       <p:cxnSp>
         <p:nvCxnSpPr>
-          <p:cNvPr id="17" name="Connector 16"/>
+          <p:cNvPr id="18" name="Connector 17"/>
           <p:cNvCxnSpPr/>
           <p:nvPr/>
         </p:nvCxnSpPr>
@@ -15695,7 +16206,7 @@
       </p:cxnSp>
       <p:sp>
         <p:nvSpPr>
-          <p:cNvPr id="18" name="TextBox 17"/>
+          <p:cNvPr id="19" name="TextBox 18"/>
           <p:cNvSpPr txBox="1"/>
           <p:nvPr/>
         </p:nvSpPr>
@@ -15730,14 +16241,14 @@
       </p:sp>
       <p:sp>
         <p:nvSpPr>
-          <p:cNvPr id="19" name="TextBox 18"/>
+          <p:cNvPr id="20" name="TextBox 19"/>
           <p:cNvSpPr txBox="1"/>
           <p:nvPr/>
         </p:nvSpPr>
         <p:spPr>
           <a:xfrm>
-            <a:off x="6446520" y="1325880"/>
-            <a:ext cx="5303520" cy="329184"/>
+            <a:off x="6446520" y="1371600"/>
+            <a:ext cx="5303520" cy="256032"/>
           </a:xfrm>
           <a:prstGeom prst="rect">
             <a:avLst/>
@@ -15752,41 +16263,6 @@
           <a:p>
             <a:pPr algn="l"/>
             <a:r>
-              <a:rPr sz="1300" b="1" i="0">
-                <a:solidFill>
-                  <a:srgbClr val="1F4E79"/>
-                </a:solidFill>
-                <a:latin typeface="Calibri"/>
-              </a:rPr>
-              <a:t>Example trace — one chunk through Phase 2</a:t>
-            </a:r>
-          </a:p>
-        </p:txBody>
-      </p:sp>
-      <p:sp>
-        <p:nvSpPr>
-          <p:cNvPr id="20" name="TextBox 19"/>
-          <p:cNvSpPr txBox="1"/>
-          <p:nvPr/>
-        </p:nvSpPr>
-        <p:spPr>
-          <a:xfrm>
-            <a:off x="6446520" y="1417320"/>
-            <a:ext cx="5303520" cy="256032"/>
-          </a:xfrm>
-          <a:prstGeom prst="rect">
-            <a:avLst/>
-          </a:prstGeom>
-          <a:noFill/>
-        </p:spPr>
-        <p:txBody>
-          <a:bodyPr wrap="square" anchor="t">
-            <a:spAutoFit/>
-          </a:bodyPr>
-          <a:lstStyle/>
-          <a:p>
-            <a:pPr algn="l"/>
-            <a:r>
               <a:rPr sz="1050" b="1" i="0">
                 <a:solidFill>
                   <a:srgbClr val="1F4E79"/>
@@ -15806,8 +16282,8 @@
         </p:nvSpPr>
         <p:spPr>
           <a:xfrm>
-            <a:off x="6446520" y="1691640"/>
-            <a:ext cx="5303520" cy="1051560"/>
+            <a:off x="6446520" y="1645920"/>
+            <a:ext cx="5303520" cy="960120"/>
           </a:xfrm>
           <a:prstGeom prst="rect">
             <a:avLst/>
@@ -15960,7 +16436,7 @@
         </p:nvSpPr>
         <p:spPr>
           <a:xfrm>
-            <a:off x="6446520" y="2834640"/>
+            <a:off x="6446520" y="2496312"/>
             <a:ext cx="5303520" cy="256032"/>
           </a:xfrm>
           <a:prstGeom prst="rect">
@@ -15995,8 +16471,8 @@
         </p:nvSpPr>
         <p:spPr>
           <a:xfrm>
-            <a:off x="6446520" y="3108960"/>
-            <a:ext cx="5303520" cy="868680"/>
+            <a:off x="6446520" y="2770632"/>
+            <a:ext cx="5303520" cy="1325880"/>
           </a:xfrm>
           <a:prstGeom prst="rect">
             <a:avLst/>
@@ -16040,7 +16516,7 @@
                 </a:solidFill>
                 <a:latin typeface="Consolas"/>
               </a:rPr>
-              <a:t># Tagger output</a:t>
+              <a:t># Tagger output  (3 LLM lookups + 2 inherited)</a:t>
             </a:r>
           </a:p>
           <a:p>
@@ -16072,7 +16548,7 @@
                 </a:solidFill>
                 <a:latin typeface="Consolas"/>
               </a:rPr>
-              <a:t>  persona_refs: [lab_assistant, microbiologist]</a:t>
+              <a:t>  # Looked up via LLM:</a:t>
             </a:r>
           </a:p>
           <a:p>
@@ -16088,7 +16564,7 @@
                 </a:solidFill>
                 <a:latin typeface="Consolas"/>
               </a:rPr>
-              <a:t>  test_ref: gram_stain</a:t>
+              <a:t>  persona_refs:    [lab_assistant, microbiologist]</a:t>
             </a:r>
           </a:p>
           <a:p>
@@ -16104,7 +16580,71 @@
                 </a:solidFill>
                 <a:latin typeface="Consolas"/>
               </a:rPr>
-              <a:t>  capability_ref: diagnostic_execution</a:t>
+              <a:t>  test_ref:        gram_stain</a:t>
+            </a:r>
+          </a:p>
+          <a:p>
+            <a:pPr algn="l">
+              <a:spcAft>
+                <a:spcPts val="0"/>
+              </a:spcAft>
+            </a:pPr>
+            <a:r>
+              <a:rPr sz="800">
+                <a:solidFill>
+                  <a:srgbClr val="1F2D3D"/>
+                </a:solidFill>
+                <a:latin typeface="Consolas"/>
+              </a:rPr>
+              <a:t>  capability_ref:  diagnostic_execution</a:t>
+            </a:r>
+          </a:p>
+          <a:p>
+            <a:pPr algn="l">
+              <a:spcAft>
+                <a:spcPts val="0"/>
+              </a:spcAft>
+            </a:pPr>
+            <a:r>
+              <a:rPr sz="800">
+                <a:solidFill>
+                  <a:srgbClr val="1F2D3D"/>
+                </a:solidFill>
+                <a:latin typeface="Consolas"/>
+              </a:rPr>
+              <a:t>  # Inherited from chunk's Phase 1 cascade buckets:</a:t>
+            </a:r>
+          </a:p>
+          <a:p>
+            <a:pPr algn="l">
+              <a:spcAft>
+                <a:spcPts val="0"/>
+              </a:spcAft>
+            </a:pPr>
+            <a:r>
+              <a:rPr sz="800">
+                <a:solidFill>
+                  <a:srgbClr val="1F2D3D"/>
+                </a:solidFill>
+                <a:latin typeface="Consolas"/>
+              </a:rPr>
+              <a:t>  theme_ref:       culture_setup       # from capability cascade</a:t>
+            </a:r>
+          </a:p>
+          <a:p>
+            <a:pPr algn="l">
+              <a:spcAft>
+                <a:spcPts val="0"/>
+              </a:spcAft>
+            </a:pPr>
+            <a:r>
+              <a:rPr sz="800">
+                <a:solidFill>
+                  <a:srgbClr val="1F2D3D"/>
+                </a:solidFill>
+                <a:latin typeface="Consolas"/>
+              </a:rPr>
+              <a:t>  epic_ref:        gram_stain_prep     # from theme cascade</a:t>
             </a:r>
           </a:p>
           <a:p>
@@ -16133,7 +16673,7 @@
         </p:nvSpPr>
         <p:spPr>
           <a:xfrm>
-            <a:off x="6446520" y="4069080"/>
+            <a:off x="6446520" y="3986784"/>
             <a:ext cx="5303520" cy="256032"/>
           </a:xfrm>
           <a:prstGeom prst="rect">
@@ -16168,8 +16708,8 @@
         </p:nvSpPr>
         <p:spPr>
           <a:xfrm>
-            <a:off x="6446520" y="4343400"/>
-            <a:ext cx="5303520" cy="2103120"/>
+            <a:off x="6446520" y="4261104"/>
+            <a:ext cx="5303520" cy="1920240"/>
           </a:xfrm>
           <a:prstGeom prst="rect">
             <a:avLst/>
@@ -16213,7 +16753,7 @@
                 </a:solidFill>
                 <a:latin typeface="Consolas"/>
               </a:rPr>
-              <a:t># Story Extractor output</a:t>
+              <a:t># Story Extractor output (one of possibly several stories per chunk)</a:t>
             </a:r>
           </a:p>
           <a:p>
@@ -16325,7 +16865,23 @@
                 </a:solidFill>
                 <a:latin typeface="Consolas"/>
               </a:rPr>
-              <a:t>persona_refs: [lab_assistant]    test_ref: gram_stain</a:t>
+              <a:t>persona_refs: [lab_assistant]            # narrowed from tagger's 2 personas</a:t>
+            </a:r>
+          </a:p>
+          <a:p>
+            <a:pPr algn="l">
+              <a:spcAft>
+                <a:spcPts val="0"/>
+              </a:spcAft>
+            </a:pPr>
+            <a:r>
+              <a:rPr sz="800">
+                <a:solidFill>
+                  <a:srgbClr val="1F2D3D"/>
+                </a:solidFill>
+                <a:latin typeface="Consolas"/>
+              </a:rPr>
+              <a:t>test_ref: gram_stain                     # this story is about the prep action</a:t>
             </a:r>
           </a:p>
           <a:p>
@@ -16678,7 +17234,7 @@
         </p:nvSpPr>
         <p:spPr>
           <a:xfrm>
-            <a:off x="457200" y="1143000"/>
+            <a:off x="457200" y="1371600"/>
             <a:ext cx="11274552" cy="256032"/>
           </a:xfrm>
           <a:prstGeom prst="rect">
@@ -16713,8 +17269,8 @@
         </p:nvSpPr>
         <p:spPr>
           <a:xfrm>
-            <a:off x="457200" y="1417320"/>
-            <a:ext cx="11274552" cy="1325880"/>
+            <a:off x="457200" y="1645920"/>
+            <a:ext cx="11274552" cy="1371600"/>
           </a:xfrm>
           <a:prstGeom prst="rect">
             <a:avLst/>
@@ -16752,7 +17308,7 @@
               </a:spcAft>
             </a:pPr>
             <a:r>
-              <a:rPr sz="900">
+              <a:rPr sz="850">
                 <a:solidFill>
                   <a:srgbClr val="1F2D3D"/>
                 </a:solidFill>
@@ -16768,7 +17324,7 @@
               </a:spcAft>
             </a:pPr>
             <a:r>
-              <a:rPr sz="900">
+              <a:rPr sz="850">
                 <a:solidFill>
                   <a:srgbClr val="1F2D3D"/>
                 </a:solidFill>
@@ -16784,7 +17340,7 @@
               </a:spcAft>
             </a:pPr>
             <a:r>
-              <a:rPr sz="900">
+              <a:rPr sz="850">
                 <a:solidFill>
                   <a:srgbClr val="1F2D3D"/>
                 </a:solidFill>
@@ -16800,7 +17356,7 @@
               </a:spcAft>
             </a:pPr>
             <a:r>
-              <a:rPr sz="900">
+              <a:rPr sz="850">
                 <a:solidFill>
                   <a:srgbClr val="1F2D3D"/>
                 </a:solidFill>
@@ -16816,13 +17372,13 @@
               </a:spcAft>
             </a:pPr>
             <a:r>
-              <a:rPr sz="900">
+              <a:rPr sz="850">
                 <a:solidFill>
                   <a:srgbClr val="1F2D3D"/>
                 </a:solidFill>
                 <a:latin typeface="Consolas"/>
               </a:rPr>
-              <a:t>shape-specific  | (capability)             sop_refs ≥ 2 distinct SOPs  →  cross-cutting</a:t>
+              <a:t>shape-specific  | (capability)             sop_refs ≥ 2 distinct SOPs  (recurring pattern)</a:t>
             </a:r>
           </a:p>
           <a:p>
@@ -16832,7 +17388,7 @@
               </a:spcAft>
             </a:pPr>
             <a:r>
-              <a:rPr sz="900">
+              <a:rPr sz="850">
                 <a:solidFill>
                   <a:srgbClr val="1F2D3D"/>
                 </a:solidFill>
@@ -16848,7 +17404,7 @@
               </a:spcAft>
             </a:pPr>
             <a:r>
-              <a:rPr sz="900">
+              <a:rPr sz="850">
                 <a:solidFill>
                   <a:srgbClr val="1F2D3D"/>
                 </a:solidFill>
@@ -16864,13 +17420,61 @@
               </a:spcAft>
             </a:pPr>
             <a:r>
-              <a:rPr sz="900">
+              <a:rPr sz="850">
                 <a:solidFill>
                   <a:srgbClr val="1F2D3D"/>
                 </a:solidFill>
                 <a:latin typeface="Consolas"/>
               </a:rPr>
               <a:t>                | (cleanup)                deprecates[], replaced_by</a:t>
+            </a:r>
+          </a:p>
+          <a:p>
+            <a:pPr algn="l">
+              <a:spcAft>
+                <a:spcPts val="0"/>
+              </a:spcAft>
+            </a:pPr>
+            <a:r>
+              <a:rPr sz="850">
+                <a:solidFill>
+                  <a:srgbClr val="1F2D3D"/>
+                </a:solidFill>
+                <a:latin typeface="Consolas"/>
+              </a:rPr>
+              <a:t/>
+            </a:r>
+          </a:p>
+          <a:p>
+            <a:pPr algn="l">
+              <a:spcAft>
+                <a:spcPts val="0"/>
+              </a:spcAft>
+            </a:pPr>
+            <a:r>
+              <a:rPr sz="850">
+                <a:solidFill>
+                  <a:srgbClr val="1F2D3D"/>
+                </a:solidFill>
+                <a:latin typeface="Consolas"/>
+              </a:rPr>
+              <a:t>note: shape=capability is a STORY TYPE (lifted recurring pattern, sop_breadth ≥ 2).</a:t>
+            </a:r>
+          </a:p>
+          <a:p>
+            <a:pPr algn="l">
+              <a:spcAft>
+                <a:spcPts val="0"/>
+              </a:spcAft>
+            </a:pPr>
+            <a:r>
+              <a:rPr sz="850">
+                <a:solidFill>
+                  <a:srgbClr val="1F2D3D"/>
+                </a:solidFill>
+                <a:latin typeface="Consolas"/>
+              </a:rPr>
+              <a:t>      It references — but is distinct from — the business_capability_v1 catalog.</a:t>
             </a:r>
           </a:p>
         </p:txBody>
@@ -16883,7 +17487,7 @@
         </p:nvSpPr>
         <p:spPr>
           <a:xfrm>
-            <a:off x="457200" y="2697480"/>
+            <a:off x="457200" y="2971800"/>
             <a:ext cx="5605272" cy="256032"/>
           </a:xfrm>
           <a:prstGeom prst="rect">
@@ -16918,8 +17522,8 @@
         </p:nvSpPr>
         <p:spPr>
           <a:xfrm>
-            <a:off x="457200" y="2971800"/>
-            <a:ext cx="5605272" cy="1691640"/>
+            <a:off x="457200" y="3246120"/>
+            <a:ext cx="5605272" cy="1554480"/>
           </a:xfrm>
           <a:prstGeom prst="rect">
             <a:avLst/>
@@ -17136,7 +17740,7 @@
         </p:nvSpPr>
         <p:spPr>
           <a:xfrm>
-            <a:off x="6126480" y="2697480"/>
+            <a:off x="6126480" y="2971800"/>
             <a:ext cx="5605272" cy="256032"/>
           </a:xfrm>
           <a:prstGeom prst="rect">
@@ -17171,8 +17775,8 @@
         </p:nvSpPr>
         <p:spPr>
           <a:xfrm>
-            <a:off x="6126480" y="2971800"/>
-            <a:ext cx="5605272" cy="1691640"/>
+            <a:off x="6126480" y="3246120"/>
+            <a:ext cx="5605272" cy="1554480"/>
           </a:xfrm>
           <a:prstGeom prst="rect">
             <a:avLst/>
@@ -17373,7 +17977,7 @@
         </p:nvSpPr>
         <p:spPr>
           <a:xfrm>
-            <a:off x="457200" y="4480560"/>
+            <a:off x="457200" y="4617720"/>
             <a:ext cx="5605272" cy="256032"/>
           </a:xfrm>
           <a:prstGeom prst="rect">
@@ -17408,8 +18012,8 @@
         </p:nvSpPr>
         <p:spPr>
           <a:xfrm>
-            <a:off x="457200" y="4754880"/>
-            <a:ext cx="5605272" cy="1691640"/>
+            <a:off x="457200" y="4892040"/>
+            <a:ext cx="5605272" cy="1554480"/>
           </a:xfrm>
           <a:prstGeom prst="rect">
             <a:avLst/>
@@ -17610,7 +18214,7 @@
         </p:nvSpPr>
         <p:spPr>
           <a:xfrm>
-            <a:off x="6126480" y="4480560"/>
+            <a:off x="6126480" y="4617720"/>
             <a:ext cx="5605272" cy="256032"/>
           </a:xfrm>
           <a:prstGeom prst="rect">
@@ -17645,8 +18249,8 @@
         </p:nvSpPr>
         <p:spPr>
           <a:xfrm>
-            <a:off x="6126480" y="4754880"/>
-            <a:ext cx="5605272" cy="1691640"/>
+            <a:off x="6126480" y="4892040"/>
+            <a:ext cx="5605272" cy="1554480"/>
           </a:xfrm>
           <a:prstGeom prst="rect">
             <a:avLst/>
@@ -18755,8 +19359,8 @@
         </p:nvSpPr>
         <p:spPr>
           <a:xfrm>
-            <a:off x="6263640" y="1371600"/>
-            <a:ext cx="5486400" cy="329184"/>
+            <a:off x="6263640" y="1417320"/>
+            <a:ext cx="5486400" cy="256032"/>
           </a:xfrm>
           <a:prstGeom prst="rect">
             <a:avLst/>
@@ -18771,47 +19375,12 @@
           <a:p>
             <a:pPr algn="l"/>
             <a:r>
-              <a:rPr sz="1300" b="1" i="0">
+              <a:rPr sz="1050" b="1" i="0">
                 <a:solidFill>
                   <a:srgbClr val="1F4E79"/>
                 </a:solidFill>
                 <a:latin typeface="Calibri"/>
               </a:rPr>
-              <a:t>Example audit traces</a:t>
-            </a:r>
-          </a:p>
-        </p:txBody>
-      </p:sp>
-      <p:sp>
-        <p:nvSpPr>
-          <p:cNvPr id="21" name="TextBox 20"/>
-          <p:cNvSpPr txBox="1"/>
-          <p:nvPr/>
-        </p:nvSpPr>
-        <p:spPr>
-          <a:xfrm>
-            <a:off x="6263640" y="1417320"/>
-            <a:ext cx="5486400" cy="256032"/>
-          </a:xfrm>
-          <a:prstGeom prst="rect">
-            <a:avLst/>
-          </a:prstGeom>
-          <a:noFill/>
-        </p:spPr>
-        <p:txBody>
-          <a:bodyPr wrap="square" anchor="t">
-            <a:spAutoFit/>
-          </a:bodyPr>
-          <a:lstStyle/>
-          <a:p>
-            <a:pPr algn="l"/>
-            <a:r>
-              <a:rPr sz="1050" b="1" i="0">
-                <a:solidFill>
-                  <a:srgbClr val="1F4E79"/>
-                </a:solidFill>
-                <a:latin typeface="Calibri"/>
-              </a:rPr>
               <a:t>PASS — story kept, audit logged</a:t>
             </a:r>
           </a:p>
@@ -18819,7 +19388,7 @@
       </p:sp>
       <p:sp>
         <p:nvSpPr>
-          <p:cNvPr id="22" name="Rectangle 21"/>
+          <p:cNvPr id="21" name="Rectangle 20"/>
           <p:cNvSpPr/>
           <p:nvPr/>
         </p:nvSpPr>
@@ -19053,7 +19622,7 @@
       </p:sp>
       <p:sp>
         <p:nvSpPr>
-          <p:cNvPr id="23" name="TextBox 22"/>
+          <p:cNvPr id="22" name="TextBox 21"/>
           <p:cNvSpPr txBox="1"/>
           <p:nvPr/>
         </p:nvSpPr>
@@ -19088,7 +19657,7 @@
       </p:sp>
       <p:sp>
         <p:nvSpPr>
-          <p:cNvPr id="24" name="Rectangle 23"/>
+          <p:cNvPr id="23" name="Rectangle 22"/>
           <p:cNvSpPr/>
           <p:nvPr/>
         </p:nvSpPr>
@@ -19402,7 +19971,7 @@
       </p:sp>
       <p:sp>
         <p:nvSpPr>
-          <p:cNvPr id="25" name="Rectangle 24"/>
+          <p:cNvPr id="24" name="Rectangle 23"/>
           <p:cNvSpPr/>
           <p:nvPr/>
         </p:nvSpPr>
@@ -19445,7 +20014,7 @@
       </p:sp>
       <p:sp>
         <p:nvSpPr>
-          <p:cNvPr id="26" name="TextBox 25"/>
+          <p:cNvPr id="25" name="TextBox 24"/>
           <p:cNvSpPr txBox="1"/>
           <p:nvPr/>
         </p:nvSpPr>
@@ -19480,7 +20049,7 @@
       </p:sp>
       <p:sp>
         <p:nvSpPr>
-          <p:cNvPr id="27" name="TextBox 26"/>
+          <p:cNvPr id="26" name="TextBox 25"/>
           <p:cNvSpPr txBox="1"/>
           <p:nvPr/>
         </p:nvSpPr>

--- a/client_alignment_deck_v2.pptx
+++ b/client_alignment_deck_v2.pptx
@@ -3317,7 +3317,7 @@
                 <a:latin typeface="Calibri"/>
               </a:rPr>
               <a:t>Our system
-4 agent classes</a:t>
+3 agent classes</a:t>
             </a:r>
           </a:p>
         </p:txBody>
@@ -3735,7 +3735,7 @@
                 </a:solidFill>
                 <a:latin typeface="Calibri"/>
               </a:rPr>
-              <a:t>•  4 agent classes: Catalog Builder, Tagger, Story Extractor, Sampled Validator.</a:t>
+              <a:t>•  3 agent classes: Catalog Builder, Story Extractor, Sampled Validator.</a:t>
             </a:r>
           </a:p>
           <a:p>
@@ -5056,7 +5056,7 @@
                 </a:solidFill>
                 <a:latin typeface="Calibri"/>
               </a:rPr>
-              <a:t>hitl_status: auto · confirmed · corrected · rejected.  Tagger has no direct trigger — confidence rolls into Story Extractor.  Milestone 1: decisions applied to corpus manually (auto emit-back on roadmap).</a:t>
+              <a:t>hitl_status: auto · confirmed · corrected · rejected.  Milestone 1: reviewer decisions applied to corpus manually (auto emit-back on roadmap).  Thresholds configurable per discipline.</a:t>
             </a:r>
           </a:p>
         </p:txBody>
@@ -5182,22 +5182,6 @@
                 <a:latin typeface="Consolas"/>
               </a:rPr>
               <a:t>catalog item     →  admit_confidence: 0.92    # rubric score (cluster or entity)</a:t>
-            </a:r>
-          </a:p>
-          <a:p>
-            <a:pPr algn="l">
-              <a:spcAft>
-                <a:spcPts val="0"/>
-              </a:spcAft>
-            </a:pPr>
-            <a:r>
-              <a:rPr sz="800">
-                <a:solidFill>
-                  <a:srgbClr val="1F2D3D"/>
-                </a:solidFill>
-                <a:latin typeface="Consolas"/>
-              </a:rPr>
-              <a:t>tagger output    →  confidence: 0.94          # rolls into story extraction_confidence</a:t>
             </a:r>
           </a:p>
           <a:p>
@@ -8922,7 +8906,7 @@
         </p:nvSpPr>
         <p:spPr>
           <a:xfrm>
-            <a:off x="4507992" y="2331720"/>
+            <a:off x="4507992" y="2423160"/>
             <a:ext cx="3200400" cy="365760"/>
           </a:xfrm>
           <a:prstGeom prst="roundRect">
@@ -8976,8 +8960,8 @@
         </p:nvSpPr>
         <p:spPr>
           <a:xfrm>
-            <a:off x="4507992" y="2834639"/>
-            <a:ext cx="3200400" cy="365760"/>
+            <a:off x="4507992" y="2926080"/>
+            <a:ext cx="3200400" cy="502920"/>
           </a:xfrm>
           <a:prstGeom prst="roundRect">
             <a:avLst/>
@@ -9017,7 +9001,8 @@
                 </a:solidFill>
                 <a:latin typeface="Calibri"/>
               </a:rPr>
-              <a:t>For each chunk (from Phase 1):</a:t>
+              <a:t>For each chunk (from Phase 1,
+with tags already attached)</a:t>
             </a:r>
           </a:p>
         </p:txBody>
@@ -9030,8 +9015,8 @@
         </p:nvSpPr>
         <p:spPr>
           <a:xfrm>
-            <a:off x="4507992" y="3291839"/>
-            <a:ext cx="3200400" cy="502920"/>
+            <a:off x="4507992" y="3584448"/>
+            <a:ext cx="3200400" cy="594360"/>
           </a:xfrm>
           <a:prstGeom prst="roundRect">
             <a:avLst/>
@@ -9071,70 +9056,16 @@
                 </a:solidFill>
                 <a:latin typeface="Calibri"/>
               </a:rPr>
-              <a:t>Tagger
-(persona + test + capability)</a:t>
-            </a:r>
-          </a:p>
-        </p:txBody>
-      </p:sp>
-      <p:sp>
-        <p:nvSpPr>
-          <p:cNvPr id="23" name="Rounded Rectangle 22"/>
-          <p:cNvSpPr/>
-          <p:nvPr/>
-        </p:nvSpPr>
-        <p:spPr>
-          <a:xfrm>
-            <a:off x="4507992" y="3950207"/>
-            <a:ext cx="3200400" cy="502920"/>
-          </a:xfrm>
-          <a:prstGeom prst="roundRect">
-            <a:avLst/>
-          </a:prstGeom>
-          <a:solidFill>
-            <a:srgbClr val="FAE9CB"/>
-          </a:solidFill>
-          <a:ln w="12700">
-            <a:solidFill>
-              <a:srgbClr val="C9952C"/>
-            </a:solidFill>
-          </a:ln>
-        </p:spPr>
-        <p:style>
-          <a:lnRef idx="1">
-            <a:schemeClr val="accent1"/>
-          </a:lnRef>
-          <a:fillRef idx="3">
-            <a:schemeClr val="accent1"/>
-          </a:fillRef>
-          <a:effectRef idx="2">
-            <a:schemeClr val="accent1"/>
-          </a:effectRef>
-          <a:fontRef idx="minor">
-            <a:schemeClr val="lt1"/>
-          </a:fontRef>
-        </p:style>
-        <p:txBody>
-          <a:bodyPr rtlCol="0" anchor="ctr" wrap="square" lIns="73152" rIns="73152" tIns="36576" bIns="36576"/>
-          <a:lstStyle/>
-          <a:p>
-            <a:pPr algn="ctr"/>
-            <a:r>
-              <a:rPr sz="1000" b="1" i="0">
-                <a:solidFill>
-                  <a:srgbClr val="1F2D3D"/>
-                </a:solidFill>
-                <a:latin typeface="Calibri"/>
-              </a:rPr>
               <a:t>Story Extractor
-(self-checks against rubric)</a:t>
-            </a:r>
-          </a:p>
-        </p:txBody>
-      </p:sp>
-      <p:sp>
-        <p:nvSpPr>
-          <p:cNvPr id="24" name="TextBox 23"/>
+(generates 4-shape story +
+self_check rubric)</a:t>
+            </a:r>
+          </a:p>
+        </p:txBody>
+      </p:sp>
+      <p:sp>
+        <p:nvSpPr>
+          <p:cNvPr id="23" name="TextBox 22"/>
           <p:cNvSpPr txBox="1"/>
           <p:nvPr/>
         </p:nvSpPr>
@@ -9169,7 +9100,7 @@
       </p:sp>
       <p:sp>
         <p:nvSpPr>
-          <p:cNvPr id="25" name="TextBox 24"/>
+          <p:cNvPr id="24" name="TextBox 23"/>
           <p:cNvSpPr txBox="1"/>
           <p:nvPr/>
         </p:nvSpPr>
@@ -9204,7 +9135,7 @@
       </p:sp>
       <p:sp>
         <p:nvSpPr>
-          <p:cNvPr id="26" name="Rounded Rectangle 25"/>
+          <p:cNvPr id="25" name="Rounded Rectangle 24"/>
           <p:cNvSpPr/>
           <p:nvPr/>
         </p:nvSpPr>
@@ -9258,7 +9189,7 @@
       </p:sp>
       <p:sp>
         <p:nvSpPr>
-          <p:cNvPr id="27" name="TextBox 26"/>
+          <p:cNvPr id="26" name="TextBox 25"/>
           <p:cNvSpPr txBox="1"/>
           <p:nvPr/>
         </p:nvSpPr>
@@ -9293,7 +9224,7 @@
       </p:sp>
       <p:sp>
         <p:nvSpPr>
-          <p:cNvPr id="28" name="TextBox 27"/>
+          <p:cNvPr id="27" name="TextBox 26"/>
           <p:cNvSpPr txBox="1"/>
           <p:nvPr/>
         </p:nvSpPr>
@@ -9328,7 +9259,7 @@
       </p:sp>
       <p:sp>
         <p:nvSpPr>
-          <p:cNvPr id="29" name="Rounded Rectangle 28"/>
+          <p:cNvPr id="28" name="Rounded Rectangle 27"/>
           <p:cNvSpPr/>
           <p:nvPr/>
         </p:nvSpPr>
@@ -9382,7 +9313,7 @@
       </p:sp>
       <p:sp>
         <p:nvSpPr>
-          <p:cNvPr id="30" name="Rounded Rectangle 29"/>
+          <p:cNvPr id="29" name="Rounded Rectangle 28"/>
           <p:cNvSpPr/>
           <p:nvPr/>
         </p:nvSpPr>
@@ -9437,7 +9368,7 @@
       </p:sp>
       <p:sp>
         <p:nvSpPr>
-          <p:cNvPr id="31" name="Rounded Rectangle 30"/>
+          <p:cNvPr id="30" name="Rounded Rectangle 29"/>
           <p:cNvSpPr/>
           <p:nvPr/>
         </p:nvSpPr>
@@ -9491,7 +9422,7 @@
       </p:sp>
       <p:sp>
         <p:nvSpPr>
-          <p:cNvPr id="32" name="TextBox 31"/>
+          <p:cNvPr id="31" name="TextBox 30"/>
           <p:cNvSpPr txBox="1"/>
           <p:nvPr/>
         </p:nvSpPr>
@@ -9526,7 +9457,7 @@
       </p:sp>
       <p:sp>
         <p:nvSpPr>
-          <p:cNvPr id="33" name="Rounded Rectangle 32"/>
+          <p:cNvPr id="32" name="Rounded Rectangle 31"/>
           <p:cNvSpPr/>
           <p:nvPr/>
         </p:nvSpPr>
@@ -9580,7 +9511,7 @@
       </p:sp>
       <p:sp>
         <p:nvSpPr>
-          <p:cNvPr id="34" name="TextBox 33"/>
+          <p:cNvPr id="33" name="TextBox 32"/>
           <p:cNvSpPr txBox="1"/>
           <p:nvPr/>
         </p:nvSpPr>
@@ -9615,7 +9546,7 @@
       </p:sp>
       <p:sp>
         <p:nvSpPr>
-          <p:cNvPr id="35" name="TextBox 34"/>
+          <p:cNvPr id="34" name="TextBox 33"/>
           <p:cNvSpPr txBox="1"/>
           <p:nvPr/>
         </p:nvSpPr>
@@ -9650,7 +9581,7 @@
       </p:sp>
       <p:sp>
         <p:nvSpPr>
-          <p:cNvPr id="36" name="Rounded Rectangle 35"/>
+          <p:cNvPr id="35" name="Rounded Rectangle 34"/>
           <p:cNvSpPr/>
           <p:nvPr/>
         </p:nvSpPr>
@@ -9704,7 +9635,7 @@
       </p:sp>
       <p:sp>
         <p:nvSpPr>
-          <p:cNvPr id="37" name="TextBox 36"/>
+          <p:cNvPr id="36" name="TextBox 35"/>
           <p:cNvSpPr txBox="1"/>
           <p:nvPr/>
         </p:nvSpPr>
@@ -9739,7 +9670,7 @@
       </p:sp>
       <p:sp>
         <p:nvSpPr>
-          <p:cNvPr id="38" name="TextBox 37"/>
+          <p:cNvPr id="37" name="TextBox 36"/>
           <p:cNvSpPr txBox="1"/>
           <p:nvPr/>
         </p:nvSpPr>
@@ -9774,7 +9705,7 @@
       </p:sp>
       <p:cxnSp>
         <p:nvCxnSpPr>
-          <p:cNvPr id="39" name="Connector 38"/>
+          <p:cNvPr id="38" name="Connector 37"/>
           <p:cNvCxnSpPr/>
           <p:nvPr/>
         </p:nvCxnSpPr>
@@ -9810,7 +9741,7 @@
       </p:cxnSp>
       <p:cxnSp>
         <p:nvCxnSpPr>
-          <p:cNvPr id="40" name="Connector 39"/>
+          <p:cNvPr id="39" name="Connector 38"/>
           <p:cNvCxnSpPr/>
           <p:nvPr/>
         </p:nvCxnSpPr>
@@ -9846,7 +9777,7 @@
       </p:cxnSp>
       <p:sp>
         <p:nvSpPr>
-          <p:cNvPr id="41" name="Rectangle 40"/>
+          <p:cNvPr id="40" name="Rectangle 39"/>
           <p:cNvSpPr/>
           <p:nvPr/>
         </p:nvSpPr>
@@ -9889,7 +9820,7 @@
       </p:sp>
       <p:sp>
         <p:nvSpPr>
-          <p:cNvPr id="42" name="TextBox 41"/>
+          <p:cNvPr id="41" name="TextBox 40"/>
           <p:cNvSpPr txBox="1"/>
           <p:nvPr/>
         </p:nvSpPr>
@@ -9924,7 +9855,7 @@
       </p:sp>
       <p:sp>
         <p:nvSpPr>
-          <p:cNvPr id="43" name="TextBox 42"/>
+          <p:cNvPr id="42" name="TextBox 41"/>
           <p:cNvSpPr txBox="1"/>
           <p:nvPr/>
         </p:nvSpPr>
@@ -10005,7 +9936,7 @@
                 </a:solidFill>
                 <a:latin typeface="Calibri"/>
               </a:rPr>
-              <a:t>The 4 agents</a:t>
+              <a:t>The 3 agents</a:t>
             </a:r>
           </a:p>
         </p:txBody>
@@ -10083,7 +10014,7 @@
                 </a:solidFill>
                 <a:latin typeface="Calibri"/>
               </a:rPr>
-              <a:t>4 LLM agents, each owning one step. Chunking, embedding, and clustering are deterministic; the LLM handles naming, tagging, extraction, and validation.</a:t>
+              <a:t>3 LLM agents, each owning one step. Chunking, embedding, clustering, and per-chunk tag assembly are deterministic; the LLM handles naming, extraction, and validation.</a:t>
             </a:r>
           </a:p>
         </p:txBody>
@@ -10097,7 +10028,7 @@
         <p:spPr>
           <a:xfrm>
             <a:off x="457200" y="1417320"/>
-            <a:ext cx="5486400" cy="2423160"/>
+            <a:ext cx="11274552" cy="2240280"/>
           </a:xfrm>
           <a:prstGeom prst="roundRect">
             <a:avLst/>
@@ -10205,7 +10136,7 @@
         <p:spPr>
           <a:xfrm>
             <a:off x="3063240" y="1618488"/>
-            <a:ext cx="2697480" cy="329184"/>
+            <a:ext cx="8485632" cy="329184"/>
           </a:xfrm>
           <a:prstGeom prst="rect">
             <a:avLst/>
@@ -10226,7 +10157,7 @@
                 </a:solidFill>
                 <a:latin typeface="Calibri"/>
               </a:rPr>
-              <a:t>Cold-discovers the 5 catalogs from the SOP corpus</a:t>
+              <a:t>Cold-discovers the 5 catalogs + per-chunk tag manifest from the SOP corpus</a:t>
             </a:r>
           </a:p>
         </p:txBody>
@@ -10240,7 +10171,7 @@
         <p:spPr>
           <a:xfrm>
             <a:off x="3063240" y="1920240"/>
-            <a:ext cx="2697480" cy="274320"/>
+            <a:ext cx="8485632" cy="274320"/>
           </a:xfrm>
           <a:prstGeom prst="rect">
             <a:avLst/>
@@ -10275,7 +10206,7 @@
         <p:spPr>
           <a:xfrm>
             <a:off x="640080" y="2331720"/>
-            <a:ext cx="5120640" cy="274320"/>
+            <a:ext cx="10908792" cy="274320"/>
           </a:xfrm>
           <a:prstGeom prst="rect">
             <a:avLst/>
@@ -10310,7 +10241,7 @@
         <p:spPr>
           <a:xfrm>
             <a:off x="640080" y="2578608"/>
-            <a:ext cx="5120640" cy="777240"/>
+            <a:ext cx="10908792" cy="731520"/>
           </a:xfrm>
           <a:prstGeom prst="rect">
             <a:avLst/>
@@ -10331,8 +10262,7 @@
                 </a:solidFill>
                 <a:latin typeface="Calibri"/>
               </a:rPr>
-              <a:t>Taxonomy mode (capability → theme → epic, top-down cascade): names each cluster and admits via rubric; child levels cluster only within their parent's chunks.
-Entity mode (persona, test): extracts named mentions per chunk, dedupes across the corpus, admits each unique entity.</a:t>
+              <a:t>Taxonomy mode (capability → theme → epic, top-down cascade): clusters chunks, names each cluster, admits via rubric; child levels cluster only within their parent's chunks.  Entity mode (persona, test): extracts named mentions per chunk, dedupes across the corpus, admits each unique entity.  As a side effect, every chunk emerges with all 5 tags attached (no separate tagging step).</a:t>
             </a:r>
           </a:p>
         </p:txBody>
@@ -10345,8 +10275,8 @@
         </p:nvSpPr>
         <p:spPr>
           <a:xfrm>
-            <a:off x="640080" y="3337560"/>
-            <a:ext cx="5120640" cy="274320"/>
+            <a:off x="640080" y="3154680"/>
+            <a:ext cx="10908792" cy="274320"/>
           </a:xfrm>
           <a:prstGeom prst="rect">
             <a:avLst/>
@@ -10380,8 +10310,8 @@
         </p:nvSpPr>
         <p:spPr>
           <a:xfrm>
-            <a:off x="640080" y="3538728"/>
-            <a:ext cx="5120640" cy="274320"/>
+            <a:off x="640080" y="3401568"/>
+            <a:ext cx="10908792" cy="256032"/>
           </a:xfrm>
           <a:prstGeom prst="rect">
             <a:avLst/>
@@ -10402,7 +10332,7 @@
                 </a:solidFill>
                 <a:latin typeface="Calibri"/>
               </a:rPr>
-              <a:t>One agent class with two modes, instead of five separate agent classes.</a:t>
+              <a:t>One agent class with two modes, instead of five separate agent classes — and tagging falls out for free.</a:t>
             </a:r>
           </a:p>
         </p:txBody>
@@ -10415,7 +10345,7 @@
         </p:nvSpPr>
         <p:spPr>
           <a:xfrm>
-            <a:off x="6245352" y="1417320"/>
+            <a:off x="457200" y="3913632"/>
             <a:ext cx="5486400" cy="2423160"/>
           </a:xfrm>
           <a:prstGeom prst="roundRect">
@@ -10469,7 +10399,7 @@
         </p:nvSpPr>
         <p:spPr>
           <a:xfrm>
-            <a:off x="6409944" y="1581912"/>
+            <a:off x="621792" y="4078224"/>
             <a:ext cx="2331720" cy="384048"/>
           </a:xfrm>
           <a:prstGeom prst="roundRect">
@@ -10510,7 +10440,7 @@
                 </a:solidFill>
                 <a:latin typeface="Calibri"/>
               </a:rPr>
-              <a:t>Tagger</a:t>
+              <a:t>Story Extractor</a:t>
             </a:r>
           </a:p>
         </p:txBody>
@@ -10523,7 +10453,7 @@
         </p:nvSpPr>
         <p:spPr>
           <a:xfrm>
-            <a:off x="8851392" y="1618488"/>
+            <a:off x="3063240" y="4114800"/>
             <a:ext cx="2697480" cy="329184"/>
           </a:xfrm>
           <a:prstGeom prst="rect">
@@ -10545,7 +10475,7 @@
                 </a:solidFill>
                 <a:latin typeface="Calibri"/>
               </a:rPr>
-              <a:t>Tags each chunk with persona / test / capability</a:t>
+              <a:t>Produces 4-shape stories with inline self-check</a:t>
             </a:r>
           </a:p>
         </p:txBody>
@@ -10558,7 +10488,7 @@
         </p:nvSpPr>
         <p:spPr>
           <a:xfrm>
-            <a:off x="8851392" y="1920240"/>
+            <a:off x="3063240" y="4416552"/>
             <a:ext cx="2697480" cy="274320"/>
           </a:xfrm>
           <a:prstGeom prst="rect">
@@ -10593,7 +10523,7 @@
         </p:nvSpPr>
         <p:spPr>
           <a:xfrm>
-            <a:off x="6428232" y="2331720"/>
+            <a:off x="640080" y="4828032"/>
             <a:ext cx="5120640" cy="274320"/>
           </a:xfrm>
           <a:prstGeom prst="rect">
@@ -10628,8 +10558,8 @@
         </p:nvSpPr>
         <p:spPr>
           <a:xfrm>
-            <a:off x="6428232" y="2578608"/>
-            <a:ext cx="5120640" cy="777240"/>
+            <a:off x="640080" y="5074920"/>
+            <a:ext cx="5120640" cy="914400"/>
           </a:xfrm>
           <a:prstGeom prst="rect">
             <a:avLst/>
@@ -10650,7 +10580,7 @@
                 </a:solidFill>
                 <a:latin typeface="Calibri"/>
               </a:rPr>
-              <a:t>Single structured-output call: looks up persona refs, test ref, and capability ref against persona_v1, test_v1, and business_capability_v1. theme_ref and epic_ref are inherited directly from the chunk's Phase 1 cascade buckets — no LLM lookup needed.</a:t>
+              <a:t>Reads the chunk's pre-attached tags from Phase 1 (capability / theme / epic / persona / test).  Generates a story (capability / workflow_stage_split / configuration_instance / cleanup) matching the chunk + tags.  Emits extraction_confidence + self_check verdict.  Story always emits to corpus; FAIL or low-conf flagged for priority review.</a:t>
             </a:r>
           </a:p>
         </p:txBody>
@@ -10663,7 +10593,7 @@
         </p:nvSpPr>
         <p:spPr>
           <a:xfrm>
-            <a:off x="6428232" y="3337560"/>
+            <a:off x="640080" y="5833872"/>
             <a:ext cx="5120640" cy="274320"/>
           </a:xfrm>
           <a:prstGeom prst="rect">
@@ -10698,8 +10628,8 @@
         </p:nvSpPr>
         <p:spPr>
           <a:xfrm>
-            <a:off x="6428232" y="3538728"/>
-            <a:ext cx="5120640" cy="274320"/>
+            <a:off x="640080" y="6080759"/>
+            <a:ext cx="5120640" cy="256032"/>
           </a:xfrm>
           <a:prstGeom prst="rect">
             <a:avLst/>
@@ -10720,7 +10650,7 @@
                 </a:solidFill>
                 <a:latin typeface="Calibri"/>
               </a:rPr>
-              <a:t>Three LLM lookups bundled into one call; theme/epic come for free from cascade.</a:t>
+              <a:t>Non-blocking: self-check on the hot path, no revise loop, no waiting for a human.</a:t>
             </a:r>
           </a:p>
         </p:txBody>
@@ -10733,7 +10663,7 @@
         </p:nvSpPr>
         <p:spPr>
           <a:xfrm>
-            <a:off x="457200" y="4114800"/>
+            <a:off x="6245352" y="3913632"/>
             <a:ext cx="5486400" cy="2423160"/>
           </a:xfrm>
           <a:prstGeom prst="roundRect">
@@ -10787,7 +10717,7 @@
         </p:nvSpPr>
         <p:spPr>
           <a:xfrm>
-            <a:off x="621792" y="4279392"/>
+            <a:off x="6409944" y="4078224"/>
             <a:ext cx="2331720" cy="384048"/>
           </a:xfrm>
           <a:prstGeom prst="roundRect">
@@ -10828,7 +10758,7 @@
                 </a:solidFill>
                 <a:latin typeface="Calibri"/>
               </a:rPr>
-              <a:t>Story Extractor</a:t>
+              <a:t>Sampled Validator</a:t>
             </a:r>
           </a:p>
         </p:txBody>
@@ -10841,7 +10771,7 @@
         </p:nvSpPr>
         <p:spPr>
           <a:xfrm>
-            <a:off x="3063240" y="4315968"/>
+            <a:off x="8851392" y="4114800"/>
             <a:ext cx="2697480" cy="329184"/>
           </a:xfrm>
           <a:prstGeom prst="rect">
@@ -10863,7 +10793,7 @@
                 </a:solidFill>
                 <a:latin typeface="Calibri"/>
               </a:rPr>
-              <a:t>Produces 4-shape stories with inline self-check</a:t>
+              <a:t>Async drift detection on a sample of stories</a:t>
             </a:r>
           </a:p>
         </p:txBody>
@@ -10876,7 +10806,7 @@
         </p:nvSpPr>
         <p:spPr>
           <a:xfrm>
-            <a:off x="3063240" y="4617720"/>
+            <a:off x="8851392" y="4416552"/>
             <a:ext cx="2697480" cy="274320"/>
           </a:xfrm>
           <a:prstGeom prst="rect">
@@ -10898,7 +10828,7 @@
                 </a:solidFill>
                 <a:latin typeface="Calibri"/>
               </a:rPr>
-              <a:t>Runs in: Phase 2 (per tagged chunk)</a:t>
+              <a:t>Runs in: Cross-cutting (~10% of emitted stories)</a:t>
             </a:r>
           </a:p>
         </p:txBody>
@@ -10911,7 +10841,7 @@
         </p:nvSpPr>
         <p:spPr>
           <a:xfrm>
-            <a:off x="640080" y="5029200"/>
+            <a:off x="6428232" y="4828032"/>
             <a:ext cx="5120640" cy="274320"/>
           </a:xfrm>
           <a:prstGeom prst="rect">
@@ -10946,8 +10876,8 @@
         </p:nvSpPr>
         <p:spPr>
           <a:xfrm>
-            <a:off x="640080" y="5276088"/>
-            <a:ext cx="5120640" cy="777240"/>
+            <a:off x="6428232" y="5074920"/>
+            <a:ext cx="5120640" cy="914400"/>
           </a:xfrm>
           <a:prstGeom prst="rect">
             <a:avLst/>
@@ -10968,7 +10898,7 @@
                 </a:solidFill>
                 <a:latin typeface="Calibri"/>
               </a:rPr>
-              <a:t>Generates story (capability / stage-split / config-instance / cleanup) matching the chunk + tags. Emits extraction_confidence + self_check verdict. Story always emits to corpus; FAIL or low-conf is flagged for priority review.</a:t>
+              <a:t>Re-runs the full Validator rubric on a sampled fraction of stories already in the corpus.  On FAIL, the story is logged to the review queue (with rubric diff) for priority review — story stays in corpus.</a:t>
             </a:r>
           </a:p>
         </p:txBody>
@@ -10981,7 +10911,7 @@
         </p:nvSpPr>
         <p:spPr>
           <a:xfrm>
-            <a:off x="640080" y="6035040"/>
+            <a:off x="6428232" y="5833872"/>
             <a:ext cx="5120640" cy="274320"/>
           </a:xfrm>
           <a:prstGeom prst="rect">
@@ -11016,8 +10946,8 @@
         </p:nvSpPr>
         <p:spPr>
           <a:xfrm>
-            <a:off x="640080" y="6236208"/>
-            <a:ext cx="5120640" cy="274320"/>
+            <a:off x="6428232" y="6080759"/>
+            <a:ext cx="5120640" cy="256032"/>
           </a:xfrm>
           <a:prstGeom prst="rect">
             <a:avLst/>
@@ -11038,324 +10968,6 @@
                 </a:solidFill>
                 <a:latin typeface="Calibri"/>
               </a:rPr>
-              <a:t>Non-blocking: self-check on the hot path, no revise loop, no waiting for a human.</a:t>
-            </a:r>
-          </a:p>
-        </p:txBody>
-      </p:sp>
-      <p:sp>
-        <p:nvSpPr>
-          <p:cNvPr id="29" name="Rounded Rectangle 28"/>
-          <p:cNvSpPr/>
-          <p:nvPr/>
-        </p:nvSpPr>
-        <p:spPr>
-          <a:xfrm>
-            <a:off x="6245352" y="4114800"/>
-            <a:ext cx="5486400" cy="2423160"/>
-          </a:xfrm>
-          <a:prstGeom prst="roundRect">
-            <a:avLst/>
-          </a:prstGeom>
-          <a:solidFill>
-            <a:srgbClr val="FBFCFE"/>
-          </a:solidFill>
-          <a:ln w="12700">
-            <a:solidFill>
-              <a:srgbClr val="C8D2DD"/>
-            </a:solidFill>
-          </a:ln>
-        </p:spPr>
-        <p:style>
-          <a:lnRef idx="1">
-            <a:schemeClr val="accent1"/>
-          </a:lnRef>
-          <a:fillRef idx="3">
-            <a:schemeClr val="accent1"/>
-          </a:fillRef>
-          <a:effectRef idx="2">
-            <a:schemeClr val="accent1"/>
-          </a:effectRef>
-          <a:fontRef idx="minor">
-            <a:schemeClr val="lt1"/>
-          </a:fontRef>
-        </p:style>
-        <p:txBody>
-          <a:bodyPr rtlCol="0" anchor="ctr" wrap="square" lIns="73152" rIns="73152" tIns="36576" bIns="36576"/>
-          <a:lstStyle/>
-          <a:p>
-            <a:pPr algn="ctr"/>
-            <a:r>
-              <a:rPr sz="1200" b="0" i="0">
-                <a:solidFill>
-                  <a:srgbClr val="1F2D3D"/>
-                </a:solidFill>
-                <a:latin typeface="Calibri"/>
-              </a:rPr>
-              <a:t/>
-            </a:r>
-          </a:p>
-        </p:txBody>
-      </p:sp>
-      <p:sp>
-        <p:nvSpPr>
-          <p:cNvPr id="30" name="Rounded Rectangle 29"/>
-          <p:cNvSpPr/>
-          <p:nvPr/>
-        </p:nvSpPr>
-        <p:spPr>
-          <a:xfrm>
-            <a:off x="6409944" y="4279392"/>
-            <a:ext cx="2331720" cy="384048"/>
-          </a:xfrm>
-          <a:prstGeom prst="roundRect">
-            <a:avLst/>
-          </a:prstGeom>
-          <a:solidFill>
-            <a:srgbClr val="FAE9CB"/>
-          </a:solidFill>
-          <a:ln w="12700">
-            <a:solidFill>
-              <a:srgbClr val="C9952C"/>
-            </a:solidFill>
-          </a:ln>
-        </p:spPr>
-        <p:style>
-          <a:lnRef idx="1">
-            <a:schemeClr val="accent1"/>
-          </a:lnRef>
-          <a:fillRef idx="3">
-            <a:schemeClr val="accent1"/>
-          </a:fillRef>
-          <a:effectRef idx="2">
-            <a:schemeClr val="accent1"/>
-          </a:effectRef>
-          <a:fontRef idx="minor">
-            <a:schemeClr val="lt1"/>
-          </a:fontRef>
-        </p:style>
-        <p:txBody>
-          <a:bodyPr rtlCol="0" anchor="ctr" wrap="square" lIns="73152" rIns="73152" tIns="36576" bIns="36576"/>
-          <a:lstStyle/>
-          <a:p>
-            <a:pPr algn="ctr"/>
-            <a:r>
-              <a:rPr sz="1250" b="1" i="0">
-                <a:solidFill>
-                  <a:srgbClr val="1F2D3D"/>
-                </a:solidFill>
-                <a:latin typeface="Calibri"/>
-              </a:rPr>
-              <a:t>Sampled Validator</a:t>
-            </a:r>
-          </a:p>
-        </p:txBody>
-      </p:sp>
-      <p:sp>
-        <p:nvSpPr>
-          <p:cNvPr id="31" name="TextBox 30"/>
-          <p:cNvSpPr txBox="1"/>
-          <p:nvPr/>
-        </p:nvSpPr>
-        <p:spPr>
-          <a:xfrm>
-            <a:off x="8851392" y="4315968"/>
-            <a:ext cx="2697480" cy="329184"/>
-          </a:xfrm>
-          <a:prstGeom prst="rect">
-            <a:avLst/>
-          </a:prstGeom>
-          <a:noFill/>
-        </p:spPr>
-        <p:txBody>
-          <a:bodyPr wrap="square" anchor="t">
-            <a:spAutoFit/>
-          </a:bodyPr>
-          <a:lstStyle/>
-          <a:p>
-            <a:pPr algn="l"/>
-            <a:r>
-              <a:rPr sz="1150" b="1" i="0">
-                <a:solidFill>
-                  <a:srgbClr val="1F4E79"/>
-                </a:solidFill>
-                <a:latin typeface="Calibri"/>
-              </a:rPr>
-              <a:t>Async drift detection on a sample of stories</a:t>
-            </a:r>
-          </a:p>
-        </p:txBody>
-      </p:sp>
-      <p:sp>
-        <p:nvSpPr>
-          <p:cNvPr id="32" name="TextBox 31"/>
-          <p:cNvSpPr txBox="1"/>
-          <p:nvPr/>
-        </p:nvSpPr>
-        <p:spPr>
-          <a:xfrm>
-            <a:off x="8851392" y="4617720"/>
-            <a:ext cx="2697480" cy="274320"/>
-          </a:xfrm>
-          <a:prstGeom prst="rect">
-            <a:avLst/>
-          </a:prstGeom>
-          <a:noFill/>
-        </p:spPr>
-        <p:txBody>
-          <a:bodyPr wrap="square" anchor="t">
-            <a:spAutoFit/>
-          </a:bodyPr>
-          <a:lstStyle/>
-          <a:p>
-            <a:pPr algn="l"/>
-            <a:r>
-              <a:rPr sz="1000" b="0" i="1">
-                <a:solidFill>
-                  <a:srgbClr val="55606E"/>
-                </a:solidFill>
-                <a:latin typeface="Calibri"/>
-              </a:rPr>
-              <a:t>Runs in: Cross-cutting (~10% of emitted stories)</a:t>
-            </a:r>
-          </a:p>
-        </p:txBody>
-      </p:sp>
-      <p:sp>
-        <p:nvSpPr>
-          <p:cNvPr id="33" name="TextBox 32"/>
-          <p:cNvSpPr txBox="1"/>
-          <p:nvPr/>
-        </p:nvSpPr>
-        <p:spPr>
-          <a:xfrm>
-            <a:off x="6428232" y="5029200"/>
-            <a:ext cx="5120640" cy="274320"/>
-          </a:xfrm>
-          <a:prstGeom prst="rect">
-            <a:avLst/>
-          </a:prstGeom>
-          <a:noFill/>
-        </p:spPr>
-        <p:txBody>
-          <a:bodyPr wrap="square" anchor="t">
-            <a:spAutoFit/>
-          </a:bodyPr>
-          <a:lstStyle/>
-          <a:p>
-            <a:pPr algn="l"/>
-            <a:r>
-              <a:rPr sz="1100" b="1" i="0">
-                <a:solidFill>
-                  <a:srgbClr val="1F2D3D"/>
-                </a:solidFill>
-                <a:latin typeface="Calibri"/>
-              </a:rPr>
-              <a:t>What it does:</a:t>
-            </a:r>
-          </a:p>
-        </p:txBody>
-      </p:sp>
-      <p:sp>
-        <p:nvSpPr>
-          <p:cNvPr id="34" name="TextBox 33"/>
-          <p:cNvSpPr txBox="1"/>
-          <p:nvPr/>
-        </p:nvSpPr>
-        <p:spPr>
-          <a:xfrm>
-            <a:off x="6428232" y="5276088"/>
-            <a:ext cx="5120640" cy="777240"/>
-          </a:xfrm>
-          <a:prstGeom prst="rect">
-            <a:avLst/>
-          </a:prstGeom>
-          <a:noFill/>
-        </p:spPr>
-        <p:txBody>
-          <a:bodyPr wrap="square" anchor="t">
-            <a:spAutoFit/>
-          </a:bodyPr>
-          <a:lstStyle/>
-          <a:p>
-            <a:pPr algn="l"/>
-            <a:r>
-              <a:rPr sz="1050" b="0" i="0">
-                <a:solidFill>
-                  <a:srgbClr val="1F2D3D"/>
-                </a:solidFill>
-                <a:latin typeface="Calibri"/>
-              </a:rPr>
-              <a:t>Re-runs the full Validator rubric on a sampled fraction of stories already in the corpus. On FAIL, the story is logged to the review queue (with rubric diff) for priority review — story stays in corpus.</a:t>
-            </a:r>
-          </a:p>
-        </p:txBody>
-      </p:sp>
-      <p:sp>
-        <p:nvSpPr>
-          <p:cNvPr id="35" name="TextBox 34"/>
-          <p:cNvSpPr txBox="1"/>
-          <p:nvPr/>
-        </p:nvSpPr>
-        <p:spPr>
-          <a:xfrm>
-            <a:off x="6428232" y="6035040"/>
-            <a:ext cx="5120640" cy="274320"/>
-          </a:xfrm>
-          <a:prstGeom prst="rect">
-            <a:avLst/>
-          </a:prstGeom>
-          <a:noFill/>
-        </p:spPr>
-        <p:txBody>
-          <a:bodyPr wrap="square" anchor="t">
-            <a:spAutoFit/>
-          </a:bodyPr>
-          <a:lstStyle/>
-          <a:p>
-            <a:pPr algn="l"/>
-            <a:r>
-              <a:rPr sz="1100" b="1" i="0">
-                <a:solidFill>
-                  <a:srgbClr val="5C8347"/>
-                </a:solidFill>
-                <a:latin typeface="Calibri"/>
-              </a:rPr>
-              <a:t>Why this is simpler:</a:t>
-            </a:r>
-          </a:p>
-        </p:txBody>
-      </p:sp>
-      <p:sp>
-        <p:nvSpPr>
-          <p:cNvPr id="36" name="TextBox 35"/>
-          <p:cNvSpPr txBox="1"/>
-          <p:nvPr/>
-        </p:nvSpPr>
-        <p:spPr>
-          <a:xfrm>
-            <a:off x="6428232" y="6236208"/>
-            <a:ext cx="5120640" cy="274320"/>
-          </a:xfrm>
-          <a:prstGeom prst="rect">
-            <a:avLst/>
-          </a:prstGeom>
-          <a:noFill/>
-        </p:spPr>
-        <p:txBody>
-          <a:bodyPr wrap="square" anchor="t">
-            <a:spAutoFit/>
-          </a:bodyPr>
-          <a:lstStyle/>
-          <a:p>
-            <a:pPr algn="l"/>
-            <a:r>
-              <a:rPr sz="1000" b="0" i="1">
-                <a:solidFill>
-                  <a:srgbClr val="55606E"/>
-                </a:solidFill>
-                <a:latin typeface="Calibri"/>
-              </a:rPr>
               <a:t>Drift detection on a sample, not a gate — never blocks emission.</a:t>
             </a:r>
           </a:p>
@@ -11363,7 +10975,7 @@
       </p:sp>
       <p:sp>
         <p:nvSpPr>
-          <p:cNvPr id="37" name="Rectangle 36"/>
+          <p:cNvPr id="29" name="Rectangle 28"/>
           <p:cNvSpPr/>
           <p:nvPr/>
         </p:nvSpPr>
@@ -11406,7 +11018,7 @@
       </p:sp>
       <p:sp>
         <p:nvSpPr>
-          <p:cNvPr id="38" name="TextBox 37"/>
+          <p:cNvPr id="30" name="TextBox 29"/>
           <p:cNvSpPr txBox="1"/>
           <p:nvPr/>
         </p:nvSpPr>
@@ -11441,7 +11053,7 @@
       </p:sp>
       <p:sp>
         <p:nvSpPr>
-          <p:cNvPr id="39" name="TextBox 38"/>
+          <p:cNvPr id="31" name="TextBox 30"/>
           <p:cNvSpPr txBox="1"/>
           <p:nvPr/>
         </p:nvSpPr>
@@ -12416,13 +12028,13 @@
           <a:p>
             <a:pPr algn="ctr"/>
             <a:r>
-              <a:rPr sz="1100" b="1" i="0">
-                <a:solidFill>
-                  <a:srgbClr val="1F2D3D"/>
-                </a:solidFill>
-                <a:latin typeface="Calibri"/>
-              </a:rPr>
-              <a:t>Catalog YAML  (5 catalogs)</a:t>
+              <a:rPr sz="1050" b="1" i="0">
+                <a:solidFill>
+                  <a:srgbClr val="1F2D3D"/>
+                </a:solidFill>
+                <a:latin typeface="Calibri"/>
+              </a:rPr>
+              <a:t>Catalog YAML  +  per-chunk tag manifest</a:t>
             </a:r>
           </a:p>
         </p:txBody>
@@ -12905,7 +12517,7 @@
                 </a:solidFill>
                 <a:latin typeface="Calibri"/>
               </a:rPr>
-              <a:t>Phase 1 outputs — 5 catalogs (3 cascade + 2 entity)</a:t>
+              <a:t>Phase 1 outputs — 5 catalogs + per-chunk tag manifest</a:t>
             </a:r>
           </a:p>
         </p:txBody>
@@ -15587,7 +15199,7 @@
                 </a:solidFill>
                 <a:latin typeface="Calibri"/>
               </a:rPr>
-              <a:t>For each SOP in parallel, walk its chunks (from Phase 1) and run Tagger then Story Extractor on each.</a:t>
+              <a:t>For each SOP in parallel, walk its chunks (Phase 1 already attached the 5 tags) and run Story Extractor on each.</a:t>
             </a:r>
           </a:p>
         </p:txBody>
@@ -15864,14 +15476,49 @@
       </p:sp>
       <p:sp>
         <p:nvSpPr>
-          <p:cNvPr id="11" name="Rounded Rectangle 10"/>
+          <p:cNvPr id="11" name="TextBox 10"/>
+          <p:cNvSpPr txBox="1"/>
+          <p:nvPr/>
+        </p:nvSpPr>
+        <p:spPr>
+          <a:xfrm>
+            <a:off x="1234440" y="3584448"/>
+            <a:ext cx="4206240" cy="201168"/>
+          </a:xfrm>
+          <a:prstGeom prst="rect">
+            <a:avLst/>
+          </a:prstGeom>
+          <a:noFill/>
+        </p:spPr>
+        <p:txBody>
+          <a:bodyPr wrap="square" anchor="t">
+            <a:spAutoFit/>
+          </a:bodyPr>
+          <a:lstStyle/>
+          <a:p>
+            <a:pPr algn="ctr"/>
+            <a:r>
+              <a:rPr sz="950" b="0" i="1">
+                <a:solidFill>
+                  <a:srgbClr val="55606E"/>
+                </a:solidFill>
+                <a:latin typeface="Calibri"/>
+              </a:rPr>
+              <a:t>Chunk arrives with all 5 tags attached (from Phase 1)</a:t>
+            </a:r>
+          </a:p>
+        </p:txBody>
+      </p:sp>
+      <p:sp>
+        <p:nvSpPr>
+          <p:cNvPr id="12" name="Rounded Rectangle 11"/>
           <p:cNvSpPr/>
           <p:nvPr/>
         </p:nvSpPr>
         <p:spPr>
           <a:xfrm>
-            <a:off x="1234440" y="3566160"/>
-            <a:ext cx="4206240" cy="365760"/>
+            <a:off x="1234440" y="3858768"/>
+            <a:ext cx="4206240" cy="640080"/>
           </a:xfrm>
           <a:prstGeom prst="roundRect">
             <a:avLst/>
@@ -15905,95 +15552,6 @@
           <a:p>
             <a:pPr algn="ctr"/>
             <a:r>
-              <a:rPr sz="1050" b="1" i="0">
-                <a:solidFill>
-                  <a:srgbClr val="1F2D3D"/>
-                </a:solidFill>
-                <a:latin typeface="Calibri"/>
-              </a:rPr>
-              <a:t>Tagger  (persona · test · capability)</a:t>
-            </a:r>
-          </a:p>
-        </p:txBody>
-      </p:sp>
-      <p:sp>
-        <p:nvSpPr>
-          <p:cNvPr id="12" name="TextBox 11"/>
-          <p:cNvSpPr txBox="1"/>
-          <p:nvPr/>
-        </p:nvSpPr>
-        <p:spPr>
-          <a:xfrm>
-            <a:off x="1234440" y="3941064"/>
-            <a:ext cx="4206240" cy="164592"/>
-          </a:xfrm>
-          <a:prstGeom prst="rect">
-            <a:avLst/>
-          </a:prstGeom>
-          <a:noFill/>
-        </p:spPr>
-        <p:txBody>
-          <a:bodyPr wrap="square" anchor="t">
-            <a:spAutoFit/>
-          </a:bodyPr>
-          <a:lstStyle/>
-          <a:p>
-            <a:pPr algn="ctr"/>
-            <a:r>
-              <a:rPr sz="800" b="0" i="1">
-                <a:solidFill>
-                  <a:srgbClr val="55606E"/>
-                </a:solidFill>
-                <a:latin typeface="Calibri"/>
-              </a:rPr>
-              <a:t>+ theme_ref / epic_ref inherited from Phase 1 cascade buckets (no LLM call)</a:t>
-            </a:r>
-          </a:p>
-        </p:txBody>
-      </p:sp>
-      <p:sp>
-        <p:nvSpPr>
-          <p:cNvPr id="13" name="Rounded Rectangle 12"/>
-          <p:cNvSpPr/>
-          <p:nvPr/>
-        </p:nvSpPr>
-        <p:spPr>
-          <a:xfrm>
-            <a:off x="1234440" y="4114800"/>
-            <a:ext cx="4206240" cy="457200"/>
-          </a:xfrm>
-          <a:prstGeom prst="roundRect">
-            <a:avLst/>
-          </a:prstGeom>
-          <a:solidFill>
-            <a:srgbClr val="FAE9CB"/>
-          </a:solidFill>
-          <a:ln w="12700">
-            <a:solidFill>
-              <a:srgbClr val="C9952C"/>
-            </a:solidFill>
-          </a:ln>
-        </p:spPr>
-        <p:style>
-          <a:lnRef idx="1">
-            <a:schemeClr val="accent1"/>
-          </a:lnRef>
-          <a:fillRef idx="3">
-            <a:schemeClr val="accent1"/>
-          </a:fillRef>
-          <a:effectRef idx="2">
-            <a:schemeClr val="accent1"/>
-          </a:effectRef>
-          <a:fontRef idx="minor">
-            <a:schemeClr val="lt1"/>
-          </a:fontRef>
-        </p:style>
-        <p:txBody>
-          <a:bodyPr rtlCol="0" anchor="ctr" wrap="square" lIns="73152" rIns="73152" tIns="36576" bIns="36576"/>
-          <a:lstStyle/>
-          <a:p>
-            <a:pPr algn="ctr"/>
-            <a:r>
               <a:rPr sz="1000" b="1" i="0">
                 <a:solidFill>
                   <a:srgbClr val="1F2D3D"/>
@@ -16008,13 +15566,13 @@
       </p:sp>
       <p:cxnSp>
         <p:nvCxnSpPr>
-          <p:cNvPr id="14" name="Connector 13"/>
+          <p:cNvPr id="13" name="Connector 12"/>
           <p:cNvCxnSpPr/>
           <p:nvPr/>
         </p:nvCxnSpPr>
         <p:spPr>
           <a:xfrm>
-            <a:off x="3337559" y="3931920"/>
+            <a:off x="3337559" y="2331720"/>
             <a:ext cx="0" cy="182880"/>
           </a:xfrm>
           <a:prstGeom prst="line">
@@ -16044,14 +15602,14 @@
       </p:cxnSp>
       <p:cxnSp>
         <p:nvCxnSpPr>
-          <p:cNvPr id="15" name="Connector 14"/>
+          <p:cNvPr id="14" name="Connector 13"/>
           <p:cNvCxnSpPr/>
           <p:nvPr/>
         </p:nvCxnSpPr>
         <p:spPr>
           <a:xfrm>
-            <a:off x="3337559" y="2331720"/>
-            <a:ext cx="0" cy="182880"/>
+            <a:off x="3337559" y="2926080"/>
+            <a:ext cx="0" cy="274320"/>
           </a:xfrm>
           <a:prstGeom prst="line">
             <a:avLst/>
@@ -16078,45 +15636,9 @@
           </a:fontRef>
         </p:style>
       </p:cxnSp>
-      <p:cxnSp>
-        <p:nvCxnSpPr>
-          <p:cNvPr id="16" name="Connector 15"/>
-          <p:cNvCxnSpPr/>
-          <p:nvPr/>
-        </p:nvCxnSpPr>
-        <p:spPr>
-          <a:xfrm>
-            <a:off x="3337559" y="2926080"/>
-            <a:ext cx="0" cy="274320"/>
-          </a:xfrm>
-          <a:prstGeom prst="line">
-            <a:avLst/>
-          </a:prstGeom>
-          <a:ln w="25400">
-            <a:solidFill>
-              <a:srgbClr val="4A6EA0"/>
-            </a:solidFill>
-            <a:tailEnd type="triangle" w="med" h="med"/>
-          </a:ln>
-        </p:spPr>
-        <p:style>
-          <a:lnRef idx="2">
-            <a:schemeClr val="accent1"/>
-          </a:lnRef>
-          <a:fillRef idx="0">
-            <a:schemeClr val="accent1"/>
-          </a:fillRef>
-          <a:effectRef idx="1">
-            <a:schemeClr val="accent1"/>
-          </a:effectRef>
-          <a:fontRef idx="minor">
-            <a:schemeClr val="tx1"/>
-          </a:fontRef>
-        </p:style>
-      </p:cxnSp>
-      <p:sp>
-        <p:nvSpPr>
-          <p:cNvPr id="17" name="Rounded Rectangle 16"/>
+      <p:sp>
+        <p:nvSpPr>
+          <p:cNvPr id="15" name="Rounded Rectangle 14"/>
           <p:cNvSpPr/>
           <p:nvPr/>
         </p:nvSpPr>
@@ -16170,7 +15692,7 @@
       </p:sp>
       <p:cxnSp>
         <p:nvCxnSpPr>
-          <p:cNvPr id="18" name="Connector 17"/>
+          <p:cNvPr id="16" name="Connector 15"/>
           <p:cNvCxnSpPr/>
           <p:nvPr/>
         </p:nvCxnSpPr>
@@ -16206,7 +15728,7 @@
       </p:cxnSp>
       <p:sp>
         <p:nvSpPr>
-          <p:cNvPr id="19" name="TextBox 18"/>
+          <p:cNvPr id="17" name="TextBox 16"/>
           <p:cNvSpPr txBox="1"/>
           <p:nvPr/>
         </p:nvSpPr>
@@ -16241,7 +15763,7 @@
       </p:sp>
       <p:sp>
         <p:nvSpPr>
-          <p:cNvPr id="20" name="TextBox 19"/>
+          <p:cNvPr id="18" name="TextBox 17"/>
           <p:cNvSpPr txBox="1"/>
           <p:nvPr/>
         </p:nvSpPr>
@@ -16269,21 +15791,21 @@
                 </a:solidFill>
                 <a:latin typeface="Calibri"/>
               </a:rPr>
-              <a:t>Chunk in</a:t>
-            </a:r>
-          </a:p>
-        </p:txBody>
-      </p:sp>
-      <p:sp>
-        <p:nvSpPr>
-          <p:cNvPr id="21" name="Rectangle 20"/>
+              <a:t>Phase 1 chunk record (input to Story Extractor)</a:t>
+            </a:r>
+          </a:p>
+        </p:txBody>
+      </p:sp>
+      <p:sp>
+        <p:nvSpPr>
+          <p:cNvPr id="19" name="Rectangle 18"/>
           <p:cNvSpPr/>
           <p:nvPr/>
         </p:nvSpPr>
         <p:spPr>
           <a:xfrm>
             <a:off x="6446520" y="1645920"/>
-            <a:ext cx="5303520" cy="960120"/>
+            <a:ext cx="5303520" cy="2103120"/>
           </a:xfrm>
           <a:prstGeom prst="rect">
             <a:avLst/>
@@ -16327,7 +15849,7 @@
                 </a:solidFill>
                 <a:latin typeface="Consolas"/>
               </a:rPr>
-              <a:t># Input chunk (already produced by Phase 1 chunking)</a:t>
+              <a:t># Phase 1 chunk record  (chunk + 5 tags, ready for Phase 2)</a:t>
             </a:r>
           </a:p>
           <a:p>
@@ -16426,17 +15948,113 @@
               <a:t>  The microbiologist reviews the smear.</a:t>
             </a:r>
           </a:p>
-        </p:txBody>
-      </p:sp>
-      <p:sp>
-        <p:nvSpPr>
-          <p:cNvPr id="22" name="TextBox 21"/>
+          <a:p>
+            <a:pPr algn="l">
+              <a:spcAft>
+                <a:spcPts val="0"/>
+              </a:spcAft>
+            </a:pPr>
+            <a:r>
+              <a:rPr sz="800">
+                <a:solidFill>
+                  <a:srgbClr val="1F2D3D"/>
+                </a:solidFill>
+                <a:latin typeface="Consolas"/>
+              </a:rPr>
+              <a:t>tags:</a:t>
+            </a:r>
+          </a:p>
+          <a:p>
+            <a:pPr algn="l">
+              <a:spcAft>
+                <a:spcPts val="0"/>
+              </a:spcAft>
+            </a:pPr>
+            <a:r>
+              <a:rPr sz="800">
+                <a:solidFill>
+                  <a:srgbClr val="1F2D3D"/>
+                </a:solidFill>
+                <a:latin typeface="Consolas"/>
+              </a:rPr>
+              <a:t>  capability_ref: diagnostic_execution   # from cascade cluster</a:t>
+            </a:r>
+          </a:p>
+          <a:p>
+            <a:pPr algn="l">
+              <a:spcAft>
+                <a:spcPts val="0"/>
+              </a:spcAft>
+            </a:pPr>
+            <a:r>
+              <a:rPr sz="800">
+                <a:solidFill>
+                  <a:srgbClr val="1F2D3D"/>
+                </a:solidFill>
+                <a:latin typeface="Consolas"/>
+              </a:rPr>
+              <a:t>  theme_ref:      culture_setup          # from cascade cluster</a:t>
+            </a:r>
+          </a:p>
+          <a:p>
+            <a:pPr algn="l">
+              <a:spcAft>
+                <a:spcPts val="0"/>
+              </a:spcAft>
+            </a:pPr>
+            <a:r>
+              <a:rPr sz="800">
+                <a:solidFill>
+                  <a:srgbClr val="1F2D3D"/>
+                </a:solidFill>
+                <a:latin typeface="Consolas"/>
+              </a:rPr>
+              <a:t>  epic_ref:       gram_stain_prep        # from cascade cluster</a:t>
+            </a:r>
+          </a:p>
+          <a:p>
+            <a:pPr algn="l">
+              <a:spcAft>
+                <a:spcPts val="0"/>
+              </a:spcAft>
+            </a:pPr>
+            <a:r>
+              <a:rPr sz="800">
+                <a:solidFill>
+                  <a:srgbClr val="1F2D3D"/>
+                </a:solidFill>
+                <a:latin typeface="Consolas"/>
+              </a:rPr>
+              <a:t>  persona_refs:   [lab_assistant, microbiologist]   # extracted</a:t>
+            </a:r>
+          </a:p>
+          <a:p>
+            <a:pPr algn="l">
+              <a:spcAft>
+                <a:spcPts val="0"/>
+              </a:spcAft>
+            </a:pPr>
+            <a:r>
+              <a:rPr sz="800">
+                <a:solidFill>
+                  <a:srgbClr val="1F2D3D"/>
+                </a:solidFill>
+                <a:latin typeface="Consolas"/>
+              </a:rPr>
+              <a:t>  test_ref:       gram_stain                        # extracted</a:t>
+            </a:r>
+          </a:p>
+        </p:txBody>
+      </p:sp>
+      <p:sp>
+        <p:nvSpPr>
+          <p:cNvPr id="20" name="TextBox 19"/>
           <p:cNvSpPr txBox="1"/>
           <p:nvPr/>
         </p:nvSpPr>
         <p:spPr>
           <a:xfrm>
-            <a:off x="6446520" y="2496312"/>
+            <a:off x="6446520" y="3749039"/>
             <a:ext cx="5303520" cy="256032"/>
           </a:xfrm>
           <a:prstGeom prst="rect">
@@ -16458,21 +16076,21 @@
                 </a:solidFill>
                 <a:latin typeface="Calibri"/>
               </a:rPr>
-              <a:t>Tagger</a:t>
-            </a:r>
-          </a:p>
-        </p:txBody>
-      </p:sp>
-      <p:sp>
-        <p:nvSpPr>
-          <p:cNvPr id="23" name="Rectangle 22"/>
+              <a:t>Story Extractor output</a:t>
+            </a:r>
+          </a:p>
+        </p:txBody>
+      </p:sp>
+      <p:sp>
+        <p:nvSpPr>
+          <p:cNvPr id="21" name="Rectangle 20"/>
           <p:cNvSpPr/>
           <p:nvPr/>
         </p:nvSpPr>
         <p:spPr>
           <a:xfrm>
-            <a:off x="6446520" y="2770632"/>
-            <a:ext cx="5303520" cy="1325880"/>
+            <a:off x="6446520" y="4023359"/>
+            <a:ext cx="5303520" cy="2240280"/>
           </a:xfrm>
           <a:prstGeom prst="rect">
             <a:avLst/>
@@ -16516,7 +16134,7 @@
                 </a:solidFill>
                 <a:latin typeface="Consolas"/>
               </a:rPr>
-              <a:t># Tagger output  (3 LLM lookups + 2 inherited)</a:t>
+              <a:t># Story Extractor output (one of possibly several stories per chunk)</a:t>
             </a:r>
           </a:p>
           <a:p>
@@ -16532,7 +16150,7 @@
                 </a:solidFill>
                 <a:latin typeface="Consolas"/>
               </a:rPr>
-              <a:t>tags:</a:t>
+              <a:t>story_id: ST_023_07_a</a:t>
             </a:r>
           </a:p>
           <a:p>
@@ -16548,7 +16166,7 @@
                 </a:solidFill>
                 <a:latin typeface="Consolas"/>
               </a:rPr>
-              <a:t>  # Looked up via LLM:</a:t>
+              <a:t>shape: workflow_stage_split</a:t>
             </a:r>
           </a:p>
           <a:p>
@@ -16564,7 +16182,7 @@
                 </a:solidFill>
                 <a:latin typeface="Consolas"/>
               </a:rPr>
-              <a:t>  persona_refs:    [lab_assistant, microbiologist]</a:t>
+              <a:t>title: Lab assistant preps Gram stain before reading</a:t>
             </a:r>
           </a:p>
           <a:p>
@@ -16580,7 +16198,7 @@
                 </a:solidFill>
                 <a:latin typeface="Consolas"/>
               </a:rPr>
-              <a:t>  test_ref:        gram_stain</a:t>
+              <a:t>sop_refs: [SOP_023]</a:t>
             </a:r>
           </a:p>
           <a:p>
@@ -16596,7 +16214,7 @@
                 </a:solidFill>
                 <a:latin typeface="Consolas"/>
               </a:rPr>
-              <a:t>  capability_ref:  diagnostic_execution</a:t>
+              <a:t>capability_ref: diagnostic_execution</a:t>
             </a:r>
           </a:p>
           <a:p>
@@ -16612,7 +16230,7 @@
                 </a:solidFill>
                 <a:latin typeface="Consolas"/>
               </a:rPr>
-              <a:t>  # Inherited from chunk's Phase 1 cascade buckets:</a:t>
+              <a:t>theme_ref: culture_setup     epic_ref: gram_stain_prep</a:t>
             </a:r>
           </a:p>
           <a:p>
@@ -16628,7 +16246,7 @@
                 </a:solidFill>
                 <a:latin typeface="Consolas"/>
               </a:rPr>
-              <a:t>  theme_ref:       culture_setup       # from capability cascade</a:t>
+              <a:t>persona_refs: [lab_assistant]            # narrowed from chunk's 2 personas</a:t>
             </a:r>
           </a:p>
           <a:p>
@@ -16644,7 +16262,7 @@
                 </a:solidFill>
                 <a:latin typeface="Consolas"/>
               </a:rPr>
-              <a:t>  epic_ref:        gram_stain_prep     # from theme cascade</a:t>
+              <a:t>test_ref: gram_stain                     # this story focuses on the prep action</a:t>
             </a:r>
           </a:p>
           <a:p>
@@ -16660,86 +16278,9 @@
                 </a:solidFill>
                 <a:latin typeface="Consolas"/>
               </a:rPr>
-              <a:t>  confidence: 0.94</a:t>
-            </a:r>
-          </a:p>
-        </p:txBody>
-      </p:sp>
-      <p:sp>
-        <p:nvSpPr>
-          <p:cNvPr id="24" name="TextBox 23"/>
-          <p:cNvSpPr txBox="1"/>
-          <p:nvPr/>
-        </p:nvSpPr>
-        <p:spPr>
-          <a:xfrm>
-            <a:off x="6446520" y="3986784"/>
-            <a:ext cx="5303520" cy="256032"/>
-          </a:xfrm>
-          <a:prstGeom prst="rect">
-            <a:avLst/>
-          </a:prstGeom>
-          <a:noFill/>
-        </p:spPr>
-        <p:txBody>
-          <a:bodyPr wrap="square" anchor="t">
-            <a:spAutoFit/>
-          </a:bodyPr>
-          <a:lstStyle/>
-          <a:p>
-            <a:pPr algn="l"/>
-            <a:r>
-              <a:rPr sz="1050" b="1" i="0">
-                <a:solidFill>
-                  <a:srgbClr val="1F4E79"/>
-                </a:solidFill>
-                <a:latin typeface="Calibri"/>
-              </a:rPr>
-              <a:t>Story Extractor</a:t>
-            </a:r>
-          </a:p>
-        </p:txBody>
-      </p:sp>
-      <p:sp>
-        <p:nvSpPr>
-          <p:cNvPr id="25" name="Rectangle 24"/>
-          <p:cNvSpPr/>
-          <p:nvPr/>
-        </p:nvSpPr>
-        <p:spPr>
-          <a:xfrm>
-            <a:off x="6446520" y="4261104"/>
-            <a:ext cx="5303520" cy="1920240"/>
-          </a:xfrm>
-          <a:prstGeom prst="rect">
-            <a:avLst/>
-          </a:prstGeom>
-          <a:solidFill>
-            <a:srgbClr val="F6F6F6"/>
-          </a:solidFill>
-          <a:ln w="9525">
-            <a:solidFill>
-              <a:srgbClr val="C0C8D0"/>
-            </a:solidFill>
-          </a:ln>
-        </p:spPr>
-        <p:style>
-          <a:lnRef idx="1">
-            <a:schemeClr val="accent1"/>
-          </a:lnRef>
-          <a:fillRef idx="3">
-            <a:schemeClr val="accent1"/>
-          </a:fillRef>
-          <a:effectRef idx="2">
-            <a:schemeClr val="accent1"/>
-          </a:effectRef>
-          <a:fontRef idx="minor">
-            <a:schemeClr val="lt1"/>
-          </a:fontRef>
-        </p:style>
-        <p:txBody>
-          <a:bodyPr rtlCol="0" anchor="t" wrap="none" tIns="54864" bIns="54864"/>
-          <a:lstStyle/>
+              <a:t>predecessor_capability: specimen_lifecycle</a:t>
+            </a:r>
+          </a:p>
           <a:p>
             <a:pPr algn="l">
               <a:spcAft>
@@ -16753,7 +16294,7 @@
                 </a:solidFill>
                 <a:latin typeface="Consolas"/>
               </a:rPr>
-              <a:t># Story Extractor output (one of possibly several stories per chunk)</a:t>
+              <a:t>successor_capability:  diagnostic_execution</a:t>
             </a:r>
           </a:p>
           <a:p>
@@ -16769,7 +16310,7 @@
                 </a:solidFill>
                 <a:latin typeface="Consolas"/>
               </a:rPr>
-              <a:t>story_id: ST_023_07_a</a:t>
+              <a:t>acceptance_criteria: ["Smear stained per protocol"]</a:t>
             </a:r>
           </a:p>
           <a:p>
@@ -16785,7 +16326,7 @@
                 </a:solidFill>
                 <a:latin typeface="Consolas"/>
               </a:rPr>
-              <a:t>shape: workflow_stage_split</a:t>
+              <a:t>extraction_confidence: 0.91</a:t>
             </a:r>
           </a:p>
           <a:p>
@@ -16801,7 +16342,7 @@
                 </a:solidFill>
                 <a:latin typeface="Consolas"/>
               </a:rPr>
-              <a:t>title: Lab assistant preps Gram stain before reading</a:t>
+              <a:t>self_check: pass</a:t>
             </a:r>
           </a:p>
           <a:p>
@@ -16817,166 +16358,6 @@
                 </a:solidFill>
                 <a:latin typeface="Consolas"/>
               </a:rPr>
-              <a:t>sop_refs: [SOP_023]</a:t>
-            </a:r>
-          </a:p>
-          <a:p>
-            <a:pPr algn="l">
-              <a:spcAft>
-                <a:spcPts val="0"/>
-              </a:spcAft>
-            </a:pPr>
-            <a:r>
-              <a:rPr sz="800">
-                <a:solidFill>
-                  <a:srgbClr val="1F2D3D"/>
-                </a:solidFill>
-                <a:latin typeface="Consolas"/>
-              </a:rPr>
-              <a:t>capability_ref: diagnostic_execution</a:t>
-            </a:r>
-          </a:p>
-          <a:p>
-            <a:pPr algn="l">
-              <a:spcAft>
-                <a:spcPts val="0"/>
-              </a:spcAft>
-            </a:pPr>
-            <a:r>
-              <a:rPr sz="800">
-                <a:solidFill>
-                  <a:srgbClr val="1F2D3D"/>
-                </a:solidFill>
-                <a:latin typeface="Consolas"/>
-              </a:rPr>
-              <a:t>theme_ref: culture_setup     epic_ref: gram_stain_prep</a:t>
-            </a:r>
-          </a:p>
-          <a:p>
-            <a:pPr algn="l">
-              <a:spcAft>
-                <a:spcPts val="0"/>
-              </a:spcAft>
-            </a:pPr>
-            <a:r>
-              <a:rPr sz="800">
-                <a:solidFill>
-                  <a:srgbClr val="1F2D3D"/>
-                </a:solidFill>
-                <a:latin typeface="Consolas"/>
-              </a:rPr>
-              <a:t>persona_refs: [lab_assistant]            # narrowed from tagger's 2 personas</a:t>
-            </a:r>
-          </a:p>
-          <a:p>
-            <a:pPr algn="l">
-              <a:spcAft>
-                <a:spcPts val="0"/>
-              </a:spcAft>
-            </a:pPr>
-            <a:r>
-              <a:rPr sz="800">
-                <a:solidFill>
-                  <a:srgbClr val="1F2D3D"/>
-                </a:solidFill>
-                <a:latin typeface="Consolas"/>
-              </a:rPr>
-              <a:t>test_ref: gram_stain                     # this story is about the prep action</a:t>
-            </a:r>
-          </a:p>
-          <a:p>
-            <a:pPr algn="l">
-              <a:spcAft>
-                <a:spcPts val="0"/>
-              </a:spcAft>
-            </a:pPr>
-            <a:r>
-              <a:rPr sz="800">
-                <a:solidFill>
-                  <a:srgbClr val="1F2D3D"/>
-                </a:solidFill>
-                <a:latin typeface="Consolas"/>
-              </a:rPr>
-              <a:t>predecessor_capability: specimen_lifecycle</a:t>
-            </a:r>
-          </a:p>
-          <a:p>
-            <a:pPr algn="l">
-              <a:spcAft>
-                <a:spcPts val="0"/>
-              </a:spcAft>
-            </a:pPr>
-            <a:r>
-              <a:rPr sz="800">
-                <a:solidFill>
-                  <a:srgbClr val="1F2D3D"/>
-                </a:solidFill>
-                <a:latin typeface="Consolas"/>
-              </a:rPr>
-              <a:t>successor_capability:  diagnostic_execution</a:t>
-            </a:r>
-          </a:p>
-          <a:p>
-            <a:pPr algn="l">
-              <a:spcAft>
-                <a:spcPts val="0"/>
-              </a:spcAft>
-            </a:pPr>
-            <a:r>
-              <a:rPr sz="800">
-                <a:solidFill>
-                  <a:srgbClr val="1F2D3D"/>
-                </a:solidFill>
-                <a:latin typeface="Consolas"/>
-              </a:rPr>
-              <a:t>acceptance_criteria: ["Smear stained per protocol"]</a:t>
-            </a:r>
-          </a:p>
-          <a:p>
-            <a:pPr algn="l">
-              <a:spcAft>
-                <a:spcPts val="0"/>
-              </a:spcAft>
-            </a:pPr>
-            <a:r>
-              <a:rPr sz="800">
-                <a:solidFill>
-                  <a:srgbClr val="1F2D3D"/>
-                </a:solidFill>
-                <a:latin typeface="Consolas"/>
-              </a:rPr>
-              <a:t>extraction_confidence: 0.91</a:t>
-            </a:r>
-          </a:p>
-          <a:p>
-            <a:pPr algn="l">
-              <a:spcAft>
-                <a:spcPts val="0"/>
-              </a:spcAft>
-            </a:pPr>
-            <a:r>
-              <a:rPr sz="800">
-                <a:solidFill>
-                  <a:srgbClr val="1F2D3D"/>
-                </a:solidFill>
-                <a:latin typeface="Consolas"/>
-              </a:rPr>
-              <a:t>self_check: pass</a:t>
-            </a:r>
-          </a:p>
-          <a:p>
-            <a:pPr algn="l">
-              <a:spcAft>
-                <a:spcPts val="0"/>
-              </a:spcAft>
-            </a:pPr>
-            <a:r>
-              <a:rPr sz="800">
-                <a:solidFill>
-                  <a:srgbClr val="1F2D3D"/>
-                </a:solidFill>
-                <a:latin typeface="Consolas"/>
-              </a:rPr>
               <a:t>hitl_status: auto</a:t>
             </a:r>
           </a:p>
@@ -16984,7 +16365,7 @@
       </p:sp>
       <p:sp>
         <p:nvSpPr>
-          <p:cNvPr id="26" name="Rectangle 25"/>
+          <p:cNvPr id="22" name="Rectangle 21"/>
           <p:cNvSpPr/>
           <p:nvPr/>
         </p:nvSpPr>
@@ -17027,7 +16408,7 @@
       </p:sp>
       <p:sp>
         <p:nvSpPr>
-          <p:cNvPr id="27" name="TextBox 26"/>
+          <p:cNvPr id="23" name="TextBox 22"/>
           <p:cNvSpPr txBox="1"/>
           <p:nvPr/>
         </p:nvSpPr>
@@ -17062,7 +16443,7 @@
       </p:sp>
       <p:sp>
         <p:nvSpPr>
-          <p:cNvPr id="28" name="TextBox 27"/>
+          <p:cNvPr id="24" name="TextBox 23"/>
           <p:cNvSpPr txBox="1"/>
           <p:nvPr/>
         </p:nvSpPr>
